--- a/exports/pptx/lessons/primary-module-02-panchabhuta/day-05-song.pptx
+++ b/exports/pptx/lessons/primary-module-02-panchabhuta/day-05-song.pptx
@@ -16,9 +16,11 @@
     <p:sldId id="264" r:id="rId10"/>
     <p:sldId id="265" r:id="rId11"/>
     <p:sldId id="266" r:id="rId12"/>
+    <p:sldId id="267" r:id="rId13"/>
+    <p:sldId id="268" r:id="rId14"/>
   </p:sldIdLst>
   <p:notesMasterIdLst>
-    <p:notesMasterId r:id="rId13"/>
+    <p:notesMasterId r:id="rId15"/>
   </p:notesMasterIdLst>
   <p:sldSz cx="9144000" cy="5143500"/>
   <p:notesSz cx="5143500" cy="9144000"/>
@@ -712,6 +714,182 @@
             <a:fld id="{F7021451-1387-4CA6-816F-3879F97B5CBC}" type="slidenum">
               <a:rPr lang="en-US"/>
               <a:t>11</a:t>
+            </a:fld>
+            <a:endParaRPr lang="en-US"/>
+          </a:p>
+        </p:txBody>
+      </p:sp>
+    </p:spTree>
+    <p:extLst>
+      <p:ext uri="{BB962C8B-B14F-4D97-AF65-F5344CB8AC3E}">
+        <p14:creationId xmlns:p14="http://schemas.microsoft.com/office/powerpoint/2010/main" val="1024086991"/>
+      </p:ext>
+    </p:extLst>
+  </p:cSld>
+  <p:clrMapOvr>
+    <a:masterClrMapping/>
+  </p:clrMapOvr>
+</p:notes>
+</file>
+
+<file path=ppt/notesSlides/notesSlide12.xml><?xml version="1.0" encoding="utf-8"?>
+<p:notes xmlns:a="http://schemas.openxmlformats.org/drawingml/2006/main" xmlns:r="http://schemas.openxmlformats.org/officeDocument/2006/relationships" xmlns:p="http://schemas.openxmlformats.org/presentationml/2006/main">
+  <p:cSld>
+    <p:spTree>
+      <p:nvGrpSpPr>
+        <p:cNvPr id="1" name=""/>
+        <p:cNvGrpSpPr/>
+        <p:nvPr/>
+      </p:nvGrpSpPr>
+      <p:grpSpPr>
+        <a:xfrm>
+          <a:off x="0" y="0"/>
+          <a:ext cx="0" cy="0"/>
+          <a:chOff x="0" y="0"/>
+          <a:chExt cx="0" cy="0"/>
+        </a:xfrm>
+      </p:grpSpPr>
+      <p:sp>
+        <p:nvSpPr>
+          <p:cNvPr id="2" name="Slide Image Placeholder 1"/>
+          <p:cNvSpPr>
+            <a:spLocks noGrp="1" noRot="1" noChangeAspect="1"/>
+          </p:cNvSpPr>
+          <p:nvPr>
+            <p:ph type="sldImg"/>
+          </p:nvPr>
+        </p:nvSpPr>
+        <p:spPr/>
+      </p:sp>
+      <p:sp>
+        <p:nvSpPr>
+          <p:cNvPr id="3" name="Notes Placeholder 2"/>
+          <p:cNvSpPr>
+            <a:spLocks noGrp="1"/>
+          </p:cNvSpPr>
+          <p:nvPr>
+            <p:ph type="body" idx="1"/>
+          </p:nvPr>
+        </p:nvSpPr>
+        <p:spPr/>
+        <p:txBody>
+          <a:bodyPr/>
+          <a:lstStyle/>
+          <a:p>
+            <a:r>
+              <a:rPr lang="en-US" dirty="0"/>
+              <a:t/>
+            </a:r>
+            <a:endParaRPr lang="en-US" dirty="0"/>
+          </a:p>
+        </p:txBody>
+      </p:sp>
+      <p:sp>
+        <p:nvSpPr>
+          <p:cNvPr id="4" name="Slide Number Placeholder 3"/>
+          <p:cNvSpPr>
+            <a:spLocks noGrp="1"/>
+          </p:cNvSpPr>
+          <p:nvPr>
+            <p:ph type="sldNum" sz="quarter" idx="10"/>
+          </p:nvPr>
+        </p:nvSpPr>
+        <p:spPr/>
+        <p:txBody>
+          <a:bodyPr/>
+          <a:lstStyle/>
+          <a:p>
+            <a:fld id="{F7021451-1387-4CA6-816F-3879F97B5CBC}" type="slidenum">
+              <a:rPr lang="en-US"/>
+              <a:t>12</a:t>
+            </a:fld>
+            <a:endParaRPr lang="en-US"/>
+          </a:p>
+        </p:txBody>
+      </p:sp>
+    </p:spTree>
+    <p:extLst>
+      <p:ext uri="{BB962C8B-B14F-4D97-AF65-F5344CB8AC3E}">
+        <p14:creationId xmlns:p14="http://schemas.microsoft.com/office/powerpoint/2010/main" val="1024086991"/>
+      </p:ext>
+    </p:extLst>
+  </p:cSld>
+  <p:clrMapOvr>
+    <a:masterClrMapping/>
+  </p:clrMapOvr>
+</p:notes>
+</file>
+
+<file path=ppt/notesSlides/notesSlide13.xml><?xml version="1.0" encoding="utf-8"?>
+<p:notes xmlns:a="http://schemas.openxmlformats.org/drawingml/2006/main" xmlns:r="http://schemas.openxmlformats.org/officeDocument/2006/relationships" xmlns:p="http://schemas.openxmlformats.org/presentationml/2006/main">
+  <p:cSld>
+    <p:spTree>
+      <p:nvGrpSpPr>
+        <p:cNvPr id="1" name=""/>
+        <p:cNvGrpSpPr/>
+        <p:nvPr/>
+      </p:nvGrpSpPr>
+      <p:grpSpPr>
+        <a:xfrm>
+          <a:off x="0" y="0"/>
+          <a:ext cx="0" cy="0"/>
+          <a:chOff x="0" y="0"/>
+          <a:chExt cx="0" cy="0"/>
+        </a:xfrm>
+      </p:grpSpPr>
+      <p:sp>
+        <p:nvSpPr>
+          <p:cNvPr id="2" name="Slide Image Placeholder 1"/>
+          <p:cNvSpPr>
+            <a:spLocks noGrp="1" noRot="1" noChangeAspect="1"/>
+          </p:cNvSpPr>
+          <p:nvPr>
+            <p:ph type="sldImg"/>
+          </p:nvPr>
+        </p:nvSpPr>
+        <p:spPr/>
+      </p:sp>
+      <p:sp>
+        <p:nvSpPr>
+          <p:cNvPr id="3" name="Notes Placeholder 2"/>
+          <p:cNvSpPr>
+            <a:spLocks noGrp="1"/>
+          </p:cNvSpPr>
+          <p:nvPr>
+            <p:ph type="body" idx="1"/>
+          </p:nvPr>
+        </p:nvSpPr>
+        <p:spPr/>
+        <p:txBody>
+          <a:bodyPr/>
+          <a:lstStyle/>
+          <a:p>
+            <a:r>
+              <a:rPr lang="en-US" dirty="0"/>
+              <a:t/>
+            </a:r>
+            <a:endParaRPr lang="en-US" dirty="0"/>
+          </a:p>
+        </p:txBody>
+      </p:sp>
+      <p:sp>
+        <p:nvSpPr>
+          <p:cNvPr id="4" name="Slide Number Placeholder 3"/>
+          <p:cNvSpPr>
+            <a:spLocks noGrp="1"/>
+          </p:cNvSpPr>
+          <p:nvPr>
+            <p:ph type="sldNum" sz="quarter" idx="10"/>
+          </p:nvPr>
+        </p:nvSpPr>
+        <p:spPr/>
+        <p:txBody>
+          <a:bodyPr/>
+          <a:lstStyle/>
+          <a:p>
+            <a:fld id="{F7021451-1387-4CA6-816F-3879F97B5CBC}" type="slidenum">
+              <a:rPr lang="en-US"/>
+              <a:t>13</a:t>
             </a:fld>
             <a:endParaRPr lang="en-US"/>
           </a:p>
@@ -1965,102 +2143,6 @@
         </p:nvSpPr>
         <p:spPr>
           <a:xfrm>
-            <a:off x="406301" y="1223963"/>
-            <a:ext cx="8498026" cy="274290"/>
-          </a:xfrm>
-          <a:prstGeom prst="rect">
-            <a:avLst/>
-          </a:prstGeom>
-          <a:noFill/>
-          <a:ln/>
-        </p:spPr>
-        <p:txBody>
-          <a:bodyPr wrap="square" lIns="0" tIns="0" rIns="0" bIns="0" rtlCol="0" anchor="t"/>
-          <a:lstStyle/>
-          <a:p>
-            <a:pPr algn="l" indent="0" marL="0">
-              <a:lnSpc>
-                <a:spcPts val="2160"/>
-              </a:lnSpc>
-              <a:spcBef>
-                <a:spcPts val="600"/>
-              </a:spcBef>
-              <a:spcAft>
-                <a:spcPts val="800"/>
-              </a:spcAft>
-              <a:buNone/>
-            </a:pPr>
-            <a:r>
-              <a:rPr lang="en-US" sz="1800" b="1" dirty="0">
-                <a:solidFill>
-                  <a:srgbClr val="E07A5F"/>
-                </a:solidFill>
-                <a:latin typeface="Georgia" pitchFamily="34" charset="0"/>
-                <a:ea typeface="Georgia" pitchFamily="34" charset="-122"/>
-                <a:cs typeface="Georgia" pitchFamily="34" charset="-120"/>
-              </a:rPr>
-              <a:t>Goal</a:t>
-            </a:r>
-            <a:endParaRPr lang="en-US" sz="1800" dirty="0"/>
-          </a:p>
-        </p:txBody>
-      </p:sp>
-      <p:sp>
-        <p:nvSpPr>
-          <p:cNvPr id="6" name="Text 4"/>
-          <p:cNvSpPr/>
-          <p:nvPr/>
-        </p:nvSpPr>
-        <p:spPr>
-          <a:xfrm>
-            <a:off x="406301" y="1637854"/>
-            <a:ext cx="8498026" cy="213271"/>
-          </a:xfrm>
-          <a:prstGeom prst="rect">
-            <a:avLst/>
-          </a:prstGeom>
-          <a:noFill/>
-          <a:ln/>
-        </p:spPr>
-        <p:txBody>
-          <a:bodyPr wrap="square" lIns="0" tIns="0" rIns="0" bIns="0" rtlCol="0" anchor="t"/>
-          <a:lstStyle/>
-          <a:p>
-            <a:pPr algn="l" indent="0" marL="0">
-              <a:lnSpc>
-                <a:spcPts val="1680"/>
-              </a:lnSpc>
-              <a:spcBef>
-                <a:spcPts val="300"/>
-              </a:spcBef>
-              <a:spcAft>
-                <a:spcPts val="300"/>
-              </a:spcAft>
-              <a:buNone/>
-            </a:pPr>
-            <a:r>
-              <a:rPr lang="en-US" sz="1200" dirty="0">
-                <a:solidFill>
-                  <a:srgbClr val="2C2C2C"/>
-                </a:solidFill>
-                <a:latin typeface="Verdana" pitchFamily="34" charset="0"/>
-                <a:ea typeface="Verdana" pitchFamily="34" charset="-122"/>
-                <a:cs typeface="Verdana" pitchFamily="34" charset="-120"/>
-              </a:rPr>
-              <a:t>Children memorise all five names (Sanskrit + English) through a song they can sing in chorus.</a:t>
-            </a:r>
-            <a:endParaRPr lang="en-US" sz="1200" dirty="0"/>
-          </a:p>
-        </p:txBody>
-      </p:sp>
-      <p:sp>
-        <p:nvSpPr>
-          <p:cNvPr id="7" name="Text 5"/>
-          <p:cNvSpPr/>
-          <p:nvPr/>
-        </p:nvSpPr>
-        <p:spPr>
-          <a:xfrm>
             <a:off x="406301" y="4434929"/>
             <a:ext cx="8498026" cy="213271"/>
           </a:xfrm>
@@ -2205,7 +2287,7 @@
                 <a:ea typeface="Georgia" pitchFamily="34" charset="-122"/>
                 <a:cs typeface="Georgia" pitchFamily="34" charset="-120"/>
               </a:rPr>
-              <a:t>Differentiation</a:t>
+              <a:t>Show + chant (2 min)</a:t>
             </a:r>
             <a:endParaRPr lang="en-US" sz="1800" dirty="0"/>
           </a:p>
@@ -2219,8 +2301,8 @@
         </p:nvSpPr>
         <p:spPr>
           <a:xfrm>
-            <a:off x="634901" y="883593"/>
-            <a:ext cx="8102798" cy="525661"/>
+            <a:off x="406301" y="870942"/>
+            <a:ext cx="8498026" cy="213271"/>
           </a:xfrm>
           <a:prstGeom prst="rect">
             <a:avLst/>
@@ -2232,18 +2314,20 @@
           <a:bodyPr wrap="square" lIns="0" tIns="0" rIns="0" bIns="0" rtlCol="0" anchor="t"/>
           <a:lstStyle/>
           <a:p>
-            <a:pPr algn="l" marL="342900" indent="-342900">
-              <a:lnSpc>
-                <a:spcPts val="1620"/>
-              </a:lnSpc>
-              <a:spcAft>
-                <a:spcPts val="300"/>
-              </a:spcAft>
-              <a:buSzPct val="100000"/>
-              <a:buChar char="•"/>
-            </a:pPr>
-            <a:r>
-              <a:rPr lang="en-US" sz="1200" b="1" dirty="0">
+            <a:pPr algn="l" indent="0" marL="0">
+              <a:lnSpc>
+                <a:spcPts val="1680"/>
+              </a:lnSpc>
+              <a:spcBef>
+                <a:spcPts val="300"/>
+              </a:spcBef>
+              <a:spcAft>
+                <a:spcPts val="300"/>
+              </a:spcAft>
+              <a:buNone/>
+            </a:pPr>
+            <a:r>
+              <a:rPr lang="en-US" sz="1200" dirty="0">
                 <a:solidFill>
                   <a:srgbClr val="2C2C2C"/>
                 </a:solidFill>
@@ -2251,71 +2335,7 @@
                 <a:ea typeface="Verdana" pitchFamily="34" charset="-122"/>
                 <a:cs typeface="Verdana" pitchFamily="34" charset="-120"/>
               </a:rPr>
-              <a:t>Tier up:</a:t>
-            </a:r>
-            <a:pPr algn="l" indent="0" marL="0">
-              <a:lnSpc>
-                <a:spcPts val="1620"/>
-              </a:lnSpc>
-              <a:spcAft>
-                <a:spcPts val="300"/>
-              </a:spcAft>
-              <a:buNone/>
-            </a:pPr>
-            <a:r>
-              <a:rPr lang="en-US" sz="1200" dirty="0">
-                <a:solidFill>
-                  <a:srgbClr val="2C2C2C"/>
-                </a:solidFill>
-                <a:latin typeface="Verdana" pitchFamily="34" charset="0"/>
-                <a:ea typeface="Verdana" pitchFamily="34" charset="-122"/>
-                <a:cs typeface="Verdana" pitchFamily="34" charset="-120"/>
-              </a:rPr>
-              <a:t> Make up a Verse 3 of the song with your own examples.</a:t>
-            </a:r>
-            <a:endParaRPr lang="en-US" sz="1200" dirty="0"/>
-          </a:p>
-          <a:p>
-            <a:pPr algn="l" marL="342900" indent="-342900">
-              <a:lnSpc>
-                <a:spcPts val="1620"/>
-              </a:lnSpc>
-              <a:spcAft>
-                <a:spcPts val="300"/>
-              </a:spcAft>
-              <a:buSzPct val="100000"/>
-              <a:buChar char="•"/>
-            </a:pPr>
-            <a:r>
-              <a:rPr lang="en-US" sz="1200" b="1" dirty="0">
-                <a:solidFill>
-                  <a:srgbClr val="2C2C2C"/>
-                </a:solidFill>
-                <a:latin typeface="Verdana" pitchFamily="34" charset="0"/>
-                <a:ea typeface="Verdana" pitchFamily="34" charset="-122"/>
-                <a:cs typeface="Verdana" pitchFamily="34" charset="-120"/>
-              </a:rPr>
-              <a:t>Tier down:</a:t>
-            </a:r>
-            <a:pPr algn="l" indent="0" marL="0">
-              <a:lnSpc>
-                <a:spcPts val="1620"/>
-              </a:lnSpc>
-              <a:spcAft>
-                <a:spcPts val="300"/>
-              </a:spcAft>
-              <a:buNone/>
-            </a:pPr>
-            <a:r>
-              <a:rPr lang="en-US" sz="1200" dirty="0">
-                <a:solidFill>
-                  <a:srgbClr val="2C2C2C"/>
-                </a:solidFill>
-                <a:latin typeface="Verdana" pitchFamily="34" charset="0"/>
-                <a:ea typeface="Verdana" pitchFamily="34" charset="-122"/>
-                <a:cs typeface="Verdana" pitchFamily="34" charset="-120"/>
-              </a:rPr>
-              <a:t> Sing along — don't worry if the words aren't perfect yet.</a:t>
+              <a:t>Hold up the best drawings (without ranking). Close with the song.</a:t>
             </a:r>
             <a:endParaRPr lang="en-US" sz="1200" dirty="0"/>
           </a:p>
@@ -2473,7 +2493,7 @@
                 <a:ea typeface="Georgia" pitchFamily="34" charset="-122"/>
                 <a:cs typeface="Georgia" pitchFamily="34" charset="-120"/>
               </a:rPr>
-              <a:t>Teacher's quick notes</a:t>
+              <a:t>Homework</a:t>
             </a:r>
             <a:endParaRPr lang="en-US" sz="1800" dirty="0"/>
           </a:p>
@@ -2487,8 +2507,8 @@
         </p:nvSpPr>
         <p:spPr>
           <a:xfrm>
-            <a:off x="406301" y="870942"/>
-            <a:ext cx="8498026" cy="426541"/>
+            <a:off x="634901" y="883593"/>
+            <a:ext cx="8102798" cy="281880"/>
           </a:xfrm>
           <a:prstGeom prst="rect">
             <a:avLst/>
@@ -2500,17 +2520,15 @@
           <a:bodyPr wrap="square" lIns="0" tIns="0" rIns="0" bIns="0" rtlCol="0" anchor="t"/>
           <a:lstStyle/>
           <a:p>
-            <a:pPr algn="l" indent="0" marL="0">
-              <a:lnSpc>
-                <a:spcPts val="1680"/>
-              </a:lnSpc>
-              <a:spcBef>
-                <a:spcPts val="300"/>
-              </a:spcBef>
-              <a:spcAft>
-                <a:spcPts val="300"/>
-              </a:spcAft>
-              <a:buNone/>
+            <a:pPr algn="l" marL="342900" indent="-342900">
+              <a:lnSpc>
+                <a:spcPts val="1620"/>
+              </a:lnSpc>
+              <a:spcAft>
+                <a:spcPts val="300"/>
+              </a:spcAft>
+              <a:buSzPct val="100000"/>
+              <a:buChar char="•"/>
             </a:pPr>
             <a:r>
               <a:rPr lang="en-US" sz="1200" dirty="0">
@@ -2521,8 +2539,33 @@
                 <a:ea typeface="Verdana" pitchFamily="34" charset="-122"/>
                 <a:cs typeface="Verdana" pitchFamily="34" charset="-120"/>
               </a:rPr>
-              <a:t>– The song is </a:t>
-            </a:r>
+              <a:t>Tomorrow we sort! Bring 2 small objects from home — anything safe and small.</a:t>
+            </a:r>
+            <a:endParaRPr lang="en-US" sz="1200" dirty="0"/>
+          </a:p>
+        </p:txBody>
+      </p:sp>
+      <p:sp>
+        <p:nvSpPr>
+          <p:cNvPr id="5" name="Text 3"/>
+          <p:cNvSpPr/>
+          <p:nvPr/>
+        </p:nvSpPr>
+        <p:spPr>
+          <a:xfrm>
+            <a:off x="406301" y="4434929"/>
+            <a:ext cx="8498026" cy="213271"/>
+          </a:xfrm>
+          <a:prstGeom prst="rect">
+            <a:avLst/>
+          </a:prstGeom>
+          <a:noFill/>
+          <a:ln/>
+        </p:spPr>
+        <p:txBody>
+          <a:bodyPr wrap="square" lIns="0" tIns="0" rIns="0" bIns="0" rtlCol="0" anchor="t"/>
+          <a:lstStyle/>
+          <a:p>
             <a:pPr algn="l" indent="0" marL="0">
               <a:lnSpc>
                 <a:spcPts val="1680"/>
@@ -2536,7 +2579,7 @@
               <a:buNone/>
             </a:pPr>
             <a:r>
-              <a:rPr lang="en-US" sz="1200" i="1" dirty="0">
+              <a:rPr lang="en-US" sz="1200" dirty="0">
                 <a:solidFill>
                   <a:srgbClr val="2C2C2C"/>
                 </a:solidFill>
@@ -2544,22 +2587,155 @@
                 <a:ea typeface="Verdana" pitchFamily="34" charset="-122"/>
                 <a:cs typeface="Verdana" pitchFamily="34" charset="-120"/>
               </a:rPr>
-              <a:t>the</a:t>
-            </a:r>
-            <a:pPr algn="l" indent="0" marL="0">
-              <a:lnSpc>
-                <a:spcPts val="1680"/>
+              <a:t>Primary ·  · IKS Curriculum</a:t>
+            </a:r>
+            <a:endParaRPr lang="en-US" sz="1200" dirty="0"/>
+          </a:p>
+        </p:txBody>
+      </p:sp>
+    </p:spTree>
+  </p:cSld>
+  <p:clrMapOvr>
+    <a:masterClrMapping/>
+  </p:clrMapOvr>
+</p:sld>
+</file>
+
+<file path=ppt/slides/slide12.xml><?xml version="1.0" encoding="utf-8"?>
+<p:sld xmlns:a="http://schemas.openxmlformats.org/drawingml/2006/main" xmlns:r="http://schemas.openxmlformats.org/officeDocument/2006/relationships" xmlns:p="http://schemas.openxmlformats.org/presentationml/2006/main">
+  <p:cSld name="Slide 12">
+    <p:bg>
+      <p:bgPr>
+        <a:solidFill>
+          <a:srgbClr val="FAF7F2"/>
+        </a:solidFill>
+      </p:bgPr>
+    </p:bg>
+    <p:spTree>
+      <p:nvGrpSpPr>
+        <p:cNvPr id="1" name=""/>
+        <p:cNvGrpSpPr/>
+        <p:nvPr/>
+      </p:nvGrpSpPr>
+      <p:grpSpPr>
+        <a:xfrm>
+          <a:off x="0" y="0"/>
+          <a:ext cx="0" cy="0"/>
+          <a:chOff x="0" y="0"/>
+          <a:chExt cx="0" cy="0"/>
+        </a:xfrm>
+      </p:grpSpPr>
+      <p:sp>
+        <p:nvSpPr>
+          <p:cNvPr id="2" name="Text 0"/>
+          <p:cNvSpPr/>
+          <p:nvPr/>
+        </p:nvSpPr>
+        <p:spPr>
+          <a:xfrm>
+            <a:off x="0" y="0"/>
+            <a:ext cx="9144000" cy="101501"/>
+          </a:xfrm>
+          <a:prstGeom prst="rect">
+            <a:avLst/>
+          </a:prstGeom>
+          <a:solidFill>
+            <a:srgbClr val="87A96B"/>
+          </a:solidFill>
+          <a:ln/>
+        </p:spPr>
+        <p:txBody>
+          <a:bodyPr wrap="square" rtlCol="0" anchor="ctr"/>
+          <a:lstStyle/>
+          <a:p>
+            <a:pPr indent="0" marL="0">
+              <a:buNone/>
+            </a:pPr>
+            <a:endParaRPr lang="en-US" dirty="0"/>
+          </a:p>
+        </p:txBody>
+      </p:sp>
+      <p:sp>
+        <p:nvSpPr>
+          <p:cNvPr id="3" name="Text 1"/>
+          <p:cNvSpPr/>
+          <p:nvPr/>
+        </p:nvSpPr>
+        <p:spPr>
+          <a:xfrm>
+            <a:off x="406301" y="457051"/>
+            <a:ext cx="8498026" cy="274290"/>
+          </a:xfrm>
+          <a:prstGeom prst="rect">
+            <a:avLst/>
+          </a:prstGeom>
+          <a:noFill/>
+          <a:ln/>
+        </p:spPr>
+        <p:txBody>
+          <a:bodyPr wrap="square" lIns="0" tIns="0" rIns="0" bIns="0" rtlCol="0" anchor="t"/>
+          <a:lstStyle/>
+          <a:p>
+            <a:pPr algn="l" indent="0" marL="0">
+              <a:lnSpc>
+                <a:spcPts val="2160"/>
               </a:lnSpc>
               <a:spcBef>
-                <a:spcPts val="300"/>
+                <a:spcPts val="600"/>
               </a:spcBef>
               <a:spcAft>
-                <a:spcPts val="300"/>
-              </a:spcAft>
-              <a:buNone/>
-            </a:pPr>
-            <a:r>
-              <a:rPr lang="en-US" sz="1200" dirty="0">
+                <a:spcPts val="800"/>
+              </a:spcAft>
+              <a:buNone/>
+            </a:pPr>
+            <a:r>
+              <a:rPr lang="en-US" sz="1800" b="1" dirty="0">
+                <a:solidFill>
+                  <a:srgbClr val="E07A5F"/>
+                </a:solidFill>
+                <a:latin typeface="Georgia" pitchFamily="34" charset="0"/>
+                <a:ea typeface="Georgia" pitchFamily="34" charset="-122"/>
+                <a:cs typeface="Georgia" pitchFamily="34" charset="-120"/>
+              </a:rPr>
+              <a:t>Differentiation</a:t>
+            </a:r>
+            <a:endParaRPr lang="en-US" sz="1800" dirty="0"/>
+          </a:p>
+        </p:txBody>
+      </p:sp>
+      <p:sp>
+        <p:nvSpPr>
+          <p:cNvPr id="4" name="Text 2"/>
+          <p:cNvSpPr/>
+          <p:nvPr/>
+        </p:nvSpPr>
+        <p:spPr>
+          <a:xfrm>
+            <a:off x="634901" y="883593"/>
+            <a:ext cx="8102798" cy="525661"/>
+          </a:xfrm>
+          <a:prstGeom prst="rect">
+            <a:avLst/>
+          </a:prstGeom>
+          <a:noFill/>
+          <a:ln/>
+        </p:spPr>
+        <p:txBody>
+          <a:bodyPr wrap="square" lIns="0" tIns="0" rIns="0" bIns="0" rtlCol="0" anchor="t"/>
+          <a:lstStyle/>
+          <a:p>
+            <a:pPr algn="l" marL="342900" indent="-342900">
+              <a:lnSpc>
+                <a:spcPts val="1620"/>
+              </a:lnSpc>
+              <a:spcAft>
+                <a:spcPts val="300"/>
+              </a:spcAft>
+              <a:buSzPct val="100000"/>
+              <a:buChar char="•"/>
+            </a:pPr>
+            <a:r>
+              <a:rPr lang="en-US" sz="1200" b="1" dirty="0">
                 <a:solidFill>
                   <a:srgbClr val="2C2C2C"/>
                 </a:solidFill>
@@ -2567,7 +2743,339 @@
                 <a:ea typeface="Verdana" pitchFamily="34" charset="-122"/>
                 <a:cs typeface="Verdana" pitchFamily="34" charset="-120"/>
               </a:rPr>
-              <a:t> memory tool of this module. Sing it at every opportunity for the rest of the year. – If a child won't sing, let them clap the rhythm instead.</a:t>
+              <a:t>Tier up:</a:t>
+            </a:r>
+            <a:pPr algn="l" indent="0" marL="0">
+              <a:lnSpc>
+                <a:spcPts val="1620"/>
+              </a:lnSpc>
+              <a:spcAft>
+                <a:spcPts val="300"/>
+              </a:spcAft>
+              <a:buNone/>
+            </a:pPr>
+            <a:r>
+              <a:rPr lang="en-US" sz="1200" dirty="0">
+                <a:solidFill>
+                  <a:srgbClr val="2C2C2C"/>
+                </a:solidFill>
+                <a:latin typeface="Verdana" pitchFamily="34" charset="0"/>
+                <a:ea typeface="Verdana" pitchFamily="34" charset="-122"/>
+                <a:cs typeface="Verdana" pitchFamily="34" charset="-120"/>
+              </a:rPr>
+              <a:t> Make up a Verse 3 of the song with your own examples.</a:t>
+            </a:r>
+            <a:endParaRPr lang="en-US" sz="1200" dirty="0"/>
+          </a:p>
+          <a:p>
+            <a:pPr algn="l" marL="342900" indent="-342900">
+              <a:lnSpc>
+                <a:spcPts val="1620"/>
+              </a:lnSpc>
+              <a:spcAft>
+                <a:spcPts val="300"/>
+              </a:spcAft>
+              <a:buSzPct val="100000"/>
+              <a:buChar char="•"/>
+            </a:pPr>
+            <a:r>
+              <a:rPr lang="en-US" sz="1200" b="1" dirty="0">
+                <a:solidFill>
+                  <a:srgbClr val="2C2C2C"/>
+                </a:solidFill>
+                <a:latin typeface="Verdana" pitchFamily="34" charset="0"/>
+                <a:ea typeface="Verdana" pitchFamily="34" charset="-122"/>
+                <a:cs typeface="Verdana" pitchFamily="34" charset="-120"/>
+              </a:rPr>
+              <a:t>Tier down:</a:t>
+            </a:r>
+            <a:pPr algn="l" indent="0" marL="0">
+              <a:lnSpc>
+                <a:spcPts val="1620"/>
+              </a:lnSpc>
+              <a:spcAft>
+                <a:spcPts val="300"/>
+              </a:spcAft>
+              <a:buNone/>
+            </a:pPr>
+            <a:r>
+              <a:rPr lang="en-US" sz="1200" dirty="0">
+                <a:solidFill>
+                  <a:srgbClr val="2C2C2C"/>
+                </a:solidFill>
+                <a:latin typeface="Verdana" pitchFamily="34" charset="0"/>
+                <a:ea typeface="Verdana" pitchFamily="34" charset="-122"/>
+                <a:cs typeface="Verdana" pitchFamily="34" charset="-120"/>
+              </a:rPr>
+              <a:t> Sing along — don't worry if the words aren't perfect yet.</a:t>
+            </a:r>
+            <a:endParaRPr lang="en-US" sz="1200" dirty="0"/>
+          </a:p>
+        </p:txBody>
+      </p:sp>
+      <p:sp>
+        <p:nvSpPr>
+          <p:cNvPr id="5" name="Text 3"/>
+          <p:cNvSpPr/>
+          <p:nvPr/>
+        </p:nvSpPr>
+        <p:spPr>
+          <a:xfrm>
+            <a:off x="406301" y="4434929"/>
+            <a:ext cx="8498026" cy="213271"/>
+          </a:xfrm>
+          <a:prstGeom prst="rect">
+            <a:avLst/>
+          </a:prstGeom>
+          <a:noFill/>
+          <a:ln/>
+        </p:spPr>
+        <p:txBody>
+          <a:bodyPr wrap="square" lIns="0" tIns="0" rIns="0" bIns="0" rtlCol="0" anchor="t"/>
+          <a:lstStyle/>
+          <a:p>
+            <a:pPr algn="l" indent="0" marL="0">
+              <a:lnSpc>
+                <a:spcPts val="1680"/>
+              </a:lnSpc>
+              <a:spcBef>
+                <a:spcPts val="300"/>
+              </a:spcBef>
+              <a:spcAft>
+                <a:spcPts val="300"/>
+              </a:spcAft>
+              <a:buNone/>
+            </a:pPr>
+            <a:r>
+              <a:rPr lang="en-US" sz="1200" dirty="0">
+                <a:solidFill>
+                  <a:srgbClr val="2C2C2C"/>
+                </a:solidFill>
+                <a:latin typeface="Verdana" pitchFamily="34" charset="0"/>
+                <a:ea typeface="Verdana" pitchFamily="34" charset="-122"/>
+                <a:cs typeface="Verdana" pitchFamily="34" charset="-120"/>
+              </a:rPr>
+              <a:t>Primary ·  · IKS Curriculum</a:t>
+            </a:r>
+            <a:endParaRPr lang="en-US" sz="1200" dirty="0"/>
+          </a:p>
+        </p:txBody>
+      </p:sp>
+    </p:spTree>
+  </p:cSld>
+  <p:clrMapOvr>
+    <a:masterClrMapping/>
+  </p:clrMapOvr>
+</p:sld>
+</file>
+
+<file path=ppt/slides/slide13.xml><?xml version="1.0" encoding="utf-8"?>
+<p:sld xmlns:a="http://schemas.openxmlformats.org/drawingml/2006/main" xmlns:r="http://schemas.openxmlformats.org/officeDocument/2006/relationships" xmlns:p="http://schemas.openxmlformats.org/presentationml/2006/main">
+  <p:cSld name="Slide 13">
+    <p:bg>
+      <p:bgPr>
+        <a:solidFill>
+          <a:srgbClr val="FAF7F2"/>
+        </a:solidFill>
+      </p:bgPr>
+    </p:bg>
+    <p:spTree>
+      <p:nvGrpSpPr>
+        <p:cNvPr id="1" name=""/>
+        <p:cNvGrpSpPr/>
+        <p:nvPr/>
+      </p:nvGrpSpPr>
+      <p:grpSpPr>
+        <a:xfrm>
+          <a:off x="0" y="0"/>
+          <a:ext cx="0" cy="0"/>
+          <a:chOff x="0" y="0"/>
+          <a:chExt cx="0" cy="0"/>
+        </a:xfrm>
+      </p:grpSpPr>
+      <p:sp>
+        <p:nvSpPr>
+          <p:cNvPr id="2" name="Text 0"/>
+          <p:cNvSpPr/>
+          <p:nvPr/>
+        </p:nvSpPr>
+        <p:spPr>
+          <a:xfrm>
+            <a:off x="0" y="0"/>
+            <a:ext cx="9144000" cy="101501"/>
+          </a:xfrm>
+          <a:prstGeom prst="rect">
+            <a:avLst/>
+          </a:prstGeom>
+          <a:solidFill>
+            <a:srgbClr val="87A96B"/>
+          </a:solidFill>
+          <a:ln/>
+        </p:spPr>
+        <p:txBody>
+          <a:bodyPr wrap="square" rtlCol="0" anchor="ctr"/>
+          <a:lstStyle/>
+          <a:p>
+            <a:pPr indent="0" marL="0">
+              <a:buNone/>
+            </a:pPr>
+            <a:endParaRPr lang="en-US" dirty="0"/>
+          </a:p>
+        </p:txBody>
+      </p:sp>
+      <p:sp>
+        <p:nvSpPr>
+          <p:cNvPr id="3" name="Text 1"/>
+          <p:cNvSpPr/>
+          <p:nvPr/>
+        </p:nvSpPr>
+        <p:spPr>
+          <a:xfrm>
+            <a:off x="406301" y="457051"/>
+            <a:ext cx="8498026" cy="274290"/>
+          </a:xfrm>
+          <a:prstGeom prst="rect">
+            <a:avLst/>
+          </a:prstGeom>
+          <a:noFill/>
+          <a:ln/>
+        </p:spPr>
+        <p:txBody>
+          <a:bodyPr wrap="square" lIns="0" tIns="0" rIns="0" bIns="0" rtlCol="0" anchor="t"/>
+          <a:lstStyle/>
+          <a:p>
+            <a:pPr algn="l" indent="0" marL="0">
+              <a:lnSpc>
+                <a:spcPts val="2160"/>
+              </a:lnSpc>
+              <a:spcBef>
+                <a:spcPts val="600"/>
+              </a:spcBef>
+              <a:spcAft>
+                <a:spcPts val="800"/>
+              </a:spcAft>
+              <a:buNone/>
+            </a:pPr>
+            <a:r>
+              <a:rPr lang="en-US" sz="1800" b="1" dirty="0">
+                <a:solidFill>
+                  <a:srgbClr val="E07A5F"/>
+                </a:solidFill>
+                <a:latin typeface="Georgia" pitchFamily="34" charset="0"/>
+                <a:ea typeface="Georgia" pitchFamily="34" charset="-122"/>
+                <a:cs typeface="Georgia" pitchFamily="34" charset="-120"/>
+              </a:rPr>
+              <a:t>Teacher's quick notes</a:t>
+            </a:r>
+            <a:endParaRPr lang="en-US" sz="1800" dirty="0"/>
+          </a:p>
+        </p:txBody>
+      </p:sp>
+      <p:sp>
+        <p:nvSpPr>
+          <p:cNvPr id="4" name="Text 2"/>
+          <p:cNvSpPr/>
+          <p:nvPr/>
+        </p:nvSpPr>
+        <p:spPr>
+          <a:xfrm>
+            <a:off x="634901" y="883593"/>
+            <a:ext cx="8102798" cy="525661"/>
+          </a:xfrm>
+          <a:prstGeom prst="rect">
+            <a:avLst/>
+          </a:prstGeom>
+          <a:noFill/>
+          <a:ln/>
+        </p:spPr>
+        <p:txBody>
+          <a:bodyPr wrap="square" lIns="0" tIns="0" rIns="0" bIns="0" rtlCol="0" anchor="t"/>
+          <a:lstStyle/>
+          <a:p>
+            <a:pPr algn="l" marL="342900" indent="-342900">
+              <a:lnSpc>
+                <a:spcPts val="1620"/>
+              </a:lnSpc>
+              <a:spcAft>
+                <a:spcPts val="300"/>
+              </a:spcAft>
+              <a:buSzPct val="100000"/>
+              <a:buChar char="•"/>
+            </a:pPr>
+            <a:r>
+              <a:rPr lang="en-US" sz="1200" dirty="0">
+                <a:solidFill>
+                  <a:srgbClr val="2C2C2C"/>
+                </a:solidFill>
+                <a:latin typeface="Verdana" pitchFamily="34" charset="0"/>
+                <a:ea typeface="Verdana" pitchFamily="34" charset="-122"/>
+                <a:cs typeface="Verdana" pitchFamily="34" charset="-120"/>
+              </a:rPr>
+              <a:t>The song is </a:t>
+            </a:r>
+            <a:pPr algn="l" indent="0" marL="0">
+              <a:lnSpc>
+                <a:spcPts val="1620"/>
+              </a:lnSpc>
+              <a:spcAft>
+                <a:spcPts val="300"/>
+              </a:spcAft>
+              <a:buNone/>
+            </a:pPr>
+            <a:r>
+              <a:rPr lang="en-US" sz="1200" i="1" dirty="0">
+                <a:solidFill>
+                  <a:srgbClr val="2C2C2C"/>
+                </a:solidFill>
+                <a:latin typeface="Verdana" pitchFamily="34" charset="0"/>
+                <a:ea typeface="Verdana" pitchFamily="34" charset="-122"/>
+                <a:cs typeface="Verdana" pitchFamily="34" charset="-120"/>
+              </a:rPr>
+              <a:t>the</a:t>
+            </a:r>
+            <a:pPr algn="l" indent="0" marL="0">
+              <a:lnSpc>
+                <a:spcPts val="1620"/>
+              </a:lnSpc>
+              <a:spcAft>
+                <a:spcPts val="300"/>
+              </a:spcAft>
+              <a:buNone/>
+            </a:pPr>
+            <a:r>
+              <a:rPr lang="en-US" sz="1200" dirty="0">
+                <a:solidFill>
+                  <a:srgbClr val="2C2C2C"/>
+                </a:solidFill>
+                <a:latin typeface="Verdana" pitchFamily="34" charset="0"/>
+                <a:ea typeface="Verdana" pitchFamily="34" charset="-122"/>
+                <a:cs typeface="Verdana" pitchFamily="34" charset="-120"/>
+              </a:rPr>
+              <a:t> memory tool of this module. Sing it at every opportunity for the rest of the year.</a:t>
+            </a:r>
+            <a:endParaRPr lang="en-US" sz="1200" dirty="0"/>
+          </a:p>
+          <a:p>
+            <a:pPr algn="l" marL="342900" indent="-342900">
+              <a:lnSpc>
+                <a:spcPts val="1620"/>
+              </a:lnSpc>
+              <a:spcAft>
+                <a:spcPts val="300"/>
+              </a:spcAft>
+              <a:buSzPct val="100000"/>
+              <a:buChar char="•"/>
+            </a:pPr>
+            <a:r>
+              <a:rPr lang="en-US" sz="1200" dirty="0">
+                <a:solidFill>
+                  <a:srgbClr val="2C2C2C"/>
+                </a:solidFill>
+                <a:latin typeface="Verdana" pitchFamily="34" charset="0"/>
+                <a:ea typeface="Verdana" pitchFamily="34" charset="-122"/>
+                <a:cs typeface="Verdana" pitchFamily="34" charset="-120"/>
+              </a:rPr>
+              <a:t>If a child won't sing, let them clap the rhythm instead.</a:t>
             </a:r>
             <a:endParaRPr lang="en-US" sz="1200" dirty="0"/>
           </a:p>
@@ -2725,7 +3233,7 @@
                 <a:ea typeface="Georgia" pitchFamily="34" charset="-122"/>
                 <a:cs typeface="Georgia" pitchFamily="34" charset="-120"/>
               </a:rPr>
-              <a:t>Materials</a:t>
+              <a:t>Goal</a:t>
             </a:r>
             <a:endParaRPr lang="en-US" sz="1800" dirty="0"/>
           </a:p>
@@ -2739,8 +3247,8 @@
         </p:nvSpPr>
         <p:spPr>
           <a:xfrm>
-            <a:off x="634901" y="883593"/>
-            <a:ext cx="8102798" cy="281880"/>
+            <a:off x="406301" y="870942"/>
+            <a:ext cx="8498026" cy="213271"/>
           </a:xfrm>
           <a:prstGeom prst="rect">
             <a:avLst/>
@@ -2752,15 +3260,17 @@
           <a:bodyPr wrap="square" lIns="0" tIns="0" rIns="0" bIns="0" rtlCol="0" anchor="t"/>
           <a:lstStyle/>
           <a:p>
-            <a:pPr algn="l" marL="342900" indent="-342900">
-              <a:lnSpc>
-                <a:spcPts val="1620"/>
-              </a:lnSpc>
-              <a:spcAft>
-                <a:spcPts val="300"/>
-              </a:spcAft>
-              <a:buSzPct val="100000"/>
-              <a:buChar char="•"/>
+            <a:pPr algn="l" indent="0" marL="0">
+              <a:lnSpc>
+                <a:spcPts val="1680"/>
+              </a:lnSpc>
+              <a:spcBef>
+                <a:spcPts val="300"/>
+              </a:spcBef>
+              <a:spcAft>
+                <a:spcPts val="300"/>
+              </a:spcAft>
+              <a:buNone/>
             </a:pPr>
             <a:r>
               <a:rPr lang="en-US" sz="1200" dirty="0">
@@ -2771,7 +3281,7 @@
                 <a:ea typeface="Verdana" pitchFamily="34" charset="-122"/>
                 <a:cs typeface="Verdana" pitchFamily="34" charset="-120"/>
               </a:rPr>
-              <a:t>(Optional) A simple drum or clapper for rhythm</a:t>
+              <a:t>Children memorise all five names (Sanskrit + English) through a song they can sing in chorus.</a:t>
             </a:r>
             <a:endParaRPr lang="en-US" sz="1200" dirty="0"/>
           </a:p>
@@ -2780,54 +3290,6 @@
       <p:sp>
         <p:nvSpPr>
           <p:cNvPr id="5" name="Text 3"/>
-          <p:cNvSpPr/>
-          <p:nvPr/>
-        </p:nvSpPr>
-        <p:spPr>
-          <a:xfrm>
-            <a:off x="406301" y="1254323"/>
-            <a:ext cx="8498026" cy="213271"/>
-          </a:xfrm>
-          <a:prstGeom prst="rect">
-            <a:avLst/>
-          </a:prstGeom>
-          <a:noFill/>
-          <a:ln/>
-        </p:spPr>
-        <p:txBody>
-          <a:bodyPr wrap="square" lIns="0" tIns="0" rIns="0" bIns="0" rtlCol="0" anchor="t"/>
-          <a:lstStyle/>
-          <a:p>
-            <a:pPr algn="l" indent="0" marL="0">
-              <a:lnSpc>
-                <a:spcPts val="1680"/>
-              </a:lnSpc>
-              <a:spcBef>
-                <a:spcPts val="300"/>
-              </a:spcBef>
-              <a:spcAft>
-                <a:spcPts val="300"/>
-              </a:spcAft>
-              <a:buNone/>
-            </a:pPr>
-            <a:r>
-              <a:rPr lang="en-US" sz="1200" dirty="0">
-                <a:solidFill>
-                  <a:srgbClr val="2C2C2C"/>
-                </a:solidFill>
-                <a:latin typeface="Verdana" pitchFamily="34" charset="0"/>
-                <a:ea typeface="Verdana" pitchFamily="34" charset="-122"/>
-                <a:cs typeface="Verdana" pitchFamily="34" charset="-120"/>
-              </a:rPr>
-              <a:t>– Five large picture cards (one per element)</a:t>
-            </a:r>
-            <a:endParaRPr lang="en-US" sz="1200" dirty="0"/>
-          </a:p>
-        </p:txBody>
-      </p:sp>
-      <p:sp>
-        <p:nvSpPr>
-          <p:cNvPr id="6" name="Text 4"/>
           <p:cNvSpPr/>
           <p:nvPr/>
         </p:nvSpPr>
@@ -2977,7 +3439,7 @@
                 <a:ea typeface="Georgia" pitchFamily="34" charset="-122"/>
                 <a:cs typeface="Georgia" pitchFamily="34" charset="-120"/>
               </a:rPr>
-              <a:t>The flow</a:t>
+              <a:t>Materials</a:t>
             </a:r>
             <a:endParaRPr lang="en-US" sz="1800" dirty="0"/>
           </a:p>
@@ -2986,6 +3448,76 @@
       <p:sp>
         <p:nvSpPr>
           <p:cNvPr id="4" name="Text 2"/>
+          <p:cNvSpPr/>
+          <p:nvPr/>
+        </p:nvSpPr>
+        <p:spPr>
+          <a:xfrm>
+            <a:off x="634901" y="883593"/>
+            <a:ext cx="8102798" cy="525661"/>
+          </a:xfrm>
+          <a:prstGeom prst="rect">
+            <a:avLst/>
+          </a:prstGeom>
+          <a:noFill/>
+          <a:ln/>
+        </p:spPr>
+        <p:txBody>
+          <a:bodyPr wrap="square" lIns="0" tIns="0" rIns="0" bIns="0" rtlCol="0" anchor="t"/>
+          <a:lstStyle/>
+          <a:p>
+            <a:pPr algn="l" marL="342900" indent="-342900">
+              <a:lnSpc>
+                <a:spcPts val="1620"/>
+              </a:lnSpc>
+              <a:spcAft>
+                <a:spcPts val="300"/>
+              </a:spcAft>
+              <a:buSzPct val="100000"/>
+              <a:buChar char="•"/>
+            </a:pPr>
+            <a:r>
+              <a:rPr lang="en-US" sz="1200" dirty="0">
+                <a:solidFill>
+                  <a:srgbClr val="2C2C2C"/>
+                </a:solidFill>
+                <a:latin typeface="Verdana" pitchFamily="34" charset="0"/>
+                <a:ea typeface="Verdana" pitchFamily="34" charset="-122"/>
+                <a:cs typeface="Verdana" pitchFamily="34" charset="-120"/>
+              </a:rPr>
+              <a:t>(Optional) A simple drum or clapper for rhythm</a:t>
+            </a:r>
+            <a:endParaRPr lang="en-US" sz="1200" dirty="0"/>
+          </a:p>
+          <a:p>
+            <a:pPr algn="l" marL="342900" indent="-342900">
+              <a:lnSpc>
+                <a:spcPts val="1620"/>
+              </a:lnSpc>
+              <a:spcAft>
+                <a:spcPts val="300"/>
+              </a:spcAft>
+              <a:buSzPct val="100000"/>
+              <a:buChar char="•"/>
+            </a:pPr>
+            <a:r>
+              <a:rPr lang="en-US" sz="1200" dirty="0">
+                <a:solidFill>
+                  <a:srgbClr val="2C2C2C"/>
+                </a:solidFill>
+                <a:latin typeface="Verdana" pitchFamily="34" charset="0"/>
+                <a:ea typeface="Verdana" pitchFamily="34" charset="-122"/>
+                <a:cs typeface="Verdana" pitchFamily="34" charset="-120"/>
+              </a:rPr>
+              <a:t>Five large picture cards (one per element)</a:t>
+            </a:r>
+            <a:endParaRPr lang="en-US" sz="1200" dirty="0"/>
+          </a:p>
+        </p:txBody>
+      </p:sp>
+      <p:sp>
+        <p:nvSpPr>
+          <p:cNvPr id="5" name="Text 3"/>
           <p:cNvSpPr/>
           <p:nvPr/>
         </p:nvSpPr>
@@ -3135,7 +3667,7 @@
                 <a:ea typeface="Georgia" pitchFamily="34" charset="-122"/>
                 <a:cs typeface="Georgia" pitchFamily="34" charset="-120"/>
               </a:rPr>
-              <a:t>Settle + chant (3 min)</a:t>
+              <a:t>The flow</a:t>
             </a:r>
             <a:endParaRPr lang="en-US" sz="1800" dirty="0"/>
           </a:p>
@@ -3144,54 +3676,6 @@
       <p:sp>
         <p:nvSpPr>
           <p:cNvPr id="4" name="Text 2"/>
-          <p:cNvSpPr/>
-          <p:nvPr/>
-        </p:nvSpPr>
-        <p:spPr>
-          <a:xfrm>
-            <a:off x="406301" y="870942"/>
-            <a:ext cx="8498026" cy="213271"/>
-          </a:xfrm>
-          <a:prstGeom prst="rect">
-            <a:avLst/>
-          </a:prstGeom>
-          <a:noFill/>
-          <a:ln/>
-        </p:spPr>
-        <p:txBody>
-          <a:bodyPr wrap="square" lIns="0" tIns="0" rIns="0" bIns="0" rtlCol="0" anchor="t"/>
-          <a:lstStyle/>
-          <a:p>
-            <a:pPr algn="l" indent="0" marL="0">
-              <a:lnSpc>
-                <a:spcPts val="1680"/>
-              </a:lnSpc>
-              <a:spcBef>
-                <a:spcPts val="300"/>
-              </a:spcBef>
-              <a:spcAft>
-                <a:spcPts val="300"/>
-              </a:spcAft>
-              <a:buNone/>
-            </a:pPr>
-            <a:r>
-              <a:rPr lang="en-US" sz="1200" dirty="0">
-                <a:solidFill>
-                  <a:srgbClr val="2C2C2C"/>
-                </a:solidFill>
-                <a:latin typeface="Verdana" pitchFamily="34" charset="0"/>
-                <a:ea typeface="Verdana" pitchFamily="34" charset="-122"/>
-                <a:cs typeface="Verdana" pitchFamily="34" charset="-120"/>
-              </a:rPr>
-              <a:t>Daily chant — by now flying.</a:t>
-            </a:r>
-            <a:endParaRPr lang="en-US" sz="1200" dirty="0"/>
-          </a:p>
-        </p:txBody>
-      </p:sp>
-      <p:sp>
-        <p:nvSpPr>
-          <p:cNvPr id="5" name="Text 3"/>
           <p:cNvSpPr/>
           <p:nvPr/>
         </p:nvSpPr>
@@ -3341,7 +3825,7 @@
                 <a:ea typeface="Georgia" pitchFamily="34" charset="-122"/>
                 <a:cs typeface="Georgia" pitchFamily="34" charset="-120"/>
               </a:rPr>
-              <a:t>Song (10 min)</a:t>
+              <a:t>Settle + chant (3 min)</a:t>
             </a:r>
             <a:endParaRPr lang="en-US" sz="1800" dirty="0"/>
           </a:p>
@@ -3356,7 +3840,7 @@
         <p:spPr>
           <a:xfrm>
             <a:off x="406301" y="870942"/>
-            <a:ext cx="8498026" cy="426541"/>
+            <a:ext cx="8498026" cy="213271"/>
           </a:xfrm>
           <a:prstGeom prst="rect">
             <a:avLst/>
@@ -3389,53 +3873,7 @@
                 <a:ea typeface="Verdana" pitchFamily="34" charset="-122"/>
                 <a:cs typeface="Verdana" pitchFamily="34" charset="-120"/>
               </a:rPr>
-              <a:t>Teach a simple tune to the chant. Suggested tune: </a:t>
-            </a:r>
-            <a:pPr algn="l" indent="0" marL="0">
-              <a:lnSpc>
-                <a:spcPts val="1680"/>
-              </a:lnSpc>
-              <a:spcBef>
-                <a:spcPts val="300"/>
-              </a:spcBef>
-              <a:spcAft>
-                <a:spcPts val="300"/>
-              </a:spcAft>
-              <a:buNone/>
-            </a:pPr>
-            <a:r>
-              <a:rPr lang="en-US" sz="1200" i="1" dirty="0">
-                <a:solidFill>
-                  <a:srgbClr val="2C2C2C"/>
-                </a:solidFill>
-                <a:latin typeface="Verdana" pitchFamily="34" charset="0"/>
-                <a:ea typeface="Verdana" pitchFamily="34" charset="-122"/>
-                <a:cs typeface="Verdana" pitchFamily="34" charset="-120"/>
-              </a:rPr>
-              <a:t>"Twinkle Twinkle Little Star"</a:t>
-            </a:r>
-            <a:pPr algn="l" indent="0" marL="0">
-              <a:lnSpc>
-                <a:spcPts val="1680"/>
-              </a:lnSpc>
-              <a:spcBef>
-                <a:spcPts val="300"/>
-              </a:spcBef>
-              <a:spcAft>
-                <a:spcPts val="300"/>
-              </a:spcAft>
-              <a:buNone/>
-            </a:pPr>
-            <a:r>
-              <a:rPr lang="en-US" sz="1200" dirty="0">
-                <a:solidFill>
-                  <a:srgbClr val="2C2C2C"/>
-                </a:solidFill>
-                <a:latin typeface="Verdana" pitchFamily="34" charset="0"/>
-                <a:ea typeface="Verdana" pitchFamily="34" charset="-122"/>
-                <a:cs typeface="Verdana" pitchFamily="34" charset="-120"/>
-              </a:rPr>
-              <a:t> (any familiar nursery tune works).</a:t>
+              <a:t>Daily chant — by now flying.</a:t>
             </a:r>
             <a:endParaRPr lang="en-US" sz="1200" dirty="0"/>
           </a:p>
@@ -3444,628 +3882,6 @@
       <p:sp>
         <p:nvSpPr>
           <p:cNvPr id="5" name="Text 3"/>
-          <p:cNvSpPr/>
-          <p:nvPr/>
-        </p:nvSpPr>
-        <p:spPr>
-          <a:xfrm>
-            <a:off x="406301" y="1373684"/>
-            <a:ext cx="8498026" cy="213271"/>
-          </a:xfrm>
-          <a:prstGeom prst="rect">
-            <a:avLst/>
-          </a:prstGeom>
-          <a:noFill/>
-          <a:ln/>
-        </p:spPr>
-        <p:txBody>
-          <a:bodyPr wrap="square" lIns="0" tIns="0" rIns="0" bIns="0" rtlCol="0" anchor="t"/>
-          <a:lstStyle/>
-          <a:p>
-            <a:pPr algn="l" indent="0" marL="0">
-              <a:lnSpc>
-                <a:spcPts val="1680"/>
-              </a:lnSpc>
-              <a:spcBef>
-                <a:spcPts val="300"/>
-              </a:spcBef>
-              <a:spcAft>
-                <a:spcPts val="300"/>
-              </a:spcAft>
-              <a:buNone/>
-            </a:pPr>
-            <a:r>
-              <a:rPr lang="en-US" sz="1200" dirty="0">
-                <a:solidFill>
-                  <a:srgbClr val="2C2C2C"/>
-                </a:solidFill>
-                <a:latin typeface="Verdana" pitchFamily="34" charset="0"/>
-                <a:ea typeface="Verdana" pitchFamily="34" charset="-122"/>
-                <a:cs typeface="Verdana" pitchFamily="34" charset="-120"/>
-              </a:rPr>
-              <a:t>Verse 1:</a:t>
-            </a:r>
-            <a:endParaRPr lang="en-US" sz="1200" dirty="0"/>
-          </a:p>
-        </p:txBody>
-      </p:sp>
-      <p:sp>
-        <p:nvSpPr>
-          <p:cNvPr id="6" name="Text 4"/>
-          <p:cNvSpPr/>
-          <p:nvPr/>
-        </p:nvSpPr>
-        <p:spPr>
-          <a:xfrm>
-            <a:off x="406301" y="1675805"/>
-            <a:ext cx="8331398" cy="842963"/>
-          </a:xfrm>
-          <a:prstGeom prst="rect">
-            <a:avLst/>
-          </a:prstGeom>
-          <a:solidFill>
-            <a:srgbClr val="FFFFFF"/>
-          </a:solidFill>
-          <a:ln/>
-        </p:spPr>
-        <p:txBody>
-          <a:bodyPr wrap="square" rtlCol="0" anchor="ctr"/>
-          <a:lstStyle/>
-          <a:p>
-            <a:pPr indent="0" marL="0">
-              <a:buNone/>
-            </a:pPr>
-            <a:endParaRPr lang="en-US" dirty="0"/>
-          </a:p>
-        </p:txBody>
-      </p:sp>
-      <p:sp>
-        <p:nvSpPr>
-          <p:cNvPr id="7" name="Shape 5"/>
-          <p:cNvSpPr/>
-          <p:nvPr/>
-        </p:nvSpPr>
-        <p:spPr>
-          <a:xfrm>
-            <a:off x="434876" y="1675805"/>
-            <a:ext cx="0" cy="842963"/>
-          </a:xfrm>
-          <a:prstGeom prst="line">
-            <a:avLst/>
-          </a:prstGeom>
-          <a:noFill/>
-          <a:ln w="57150">
-            <a:solidFill>
-              <a:srgbClr val="E07A5F"/>
-            </a:solidFill>
-            <a:prstDash val="solid"/>
-          </a:ln>
-        </p:spPr>
-      </p:sp>
-      <p:sp>
-        <p:nvSpPr>
-          <p:cNvPr id="8" name="Text 6"/>
-          <p:cNvSpPr/>
-          <p:nvPr/>
-        </p:nvSpPr>
-        <p:spPr>
-          <a:xfrm>
-            <a:off x="692051" y="1866305"/>
-            <a:ext cx="7973389" cy="461963"/>
-          </a:xfrm>
-          <a:prstGeom prst="rect">
-            <a:avLst/>
-          </a:prstGeom>
-          <a:noFill/>
-          <a:ln/>
-        </p:spPr>
-        <p:txBody>
-          <a:bodyPr wrap="square" lIns="0" tIns="0" rIns="0" bIns="0" rtlCol="0" anchor="t"/>
-          <a:lstStyle/>
-          <a:p>
-            <a:pPr algn="l" indent="0" marL="0">
-              <a:lnSpc>
-                <a:spcPts val="1820"/>
-              </a:lnSpc>
-              <a:spcBef>
-                <a:spcPts val="300"/>
-              </a:spcBef>
-              <a:spcAft>
-                <a:spcPts val="300"/>
-              </a:spcAft>
-              <a:buNone/>
-            </a:pPr>
-            <a:r>
-              <a:rPr lang="en-US" sz="1300" i="1" dirty="0">
-                <a:solidFill>
-                  <a:srgbClr val="2C2C2C"/>
-                </a:solidFill>
-                <a:latin typeface="Georgia" pitchFamily="34" charset="0"/>
-                <a:ea typeface="Georgia" pitchFamily="34" charset="-122"/>
-                <a:cs typeface="Georgia" pitchFamily="34" charset="-120"/>
-              </a:rPr>
-              <a:t>Pṛthvī, ap, tejas, vāyu, ākāśa</a:t>
-            </a:r>
-            <a:pPr algn="l" indent="0" marL="0">
-              <a:lnSpc>
-                <a:spcPts val="1820"/>
-              </a:lnSpc>
-              <a:spcBef>
-                <a:spcPts val="300"/>
-              </a:spcBef>
-              <a:spcAft>
-                <a:spcPts val="300"/>
-              </a:spcAft>
-              <a:buNone/>
-            </a:pPr>
-            <a:r>
-              <a:rPr lang="en-US" sz="1300" dirty="0">
-                <a:solidFill>
-                  <a:srgbClr val="2C2C2C"/>
-                </a:solidFill>
-                <a:latin typeface="Georgia" pitchFamily="34" charset="0"/>
-                <a:ea typeface="Georgia" pitchFamily="34" charset="-122"/>
-                <a:cs typeface="Georgia" pitchFamily="34" charset="-120"/>
-              </a:rPr>
-              <a:t> </a:t>
-            </a:r>
-            <a:pPr algn="l" indent="0" marL="0">
-              <a:lnSpc>
-                <a:spcPts val="1820"/>
-              </a:lnSpc>
-              <a:spcBef>
-                <a:spcPts val="300"/>
-              </a:spcBef>
-              <a:spcAft>
-                <a:spcPts val="300"/>
-              </a:spcAft>
-              <a:buNone/>
-            </a:pPr>
-            <a:r>
-              <a:rPr lang="en-US" sz="1300" i="1" dirty="0">
-                <a:solidFill>
-                  <a:srgbClr val="2C2C2C"/>
-                </a:solidFill>
-                <a:latin typeface="Georgia" pitchFamily="34" charset="0"/>
-                <a:ea typeface="Georgia" pitchFamily="34" charset="-122"/>
-                <a:cs typeface="Georgia" pitchFamily="34" charset="-120"/>
-              </a:rPr>
-              <a:t>Five great friends are everywhere</a:t>
-            </a:r>
-            <a:pPr algn="l" indent="0" marL="0">
-              <a:lnSpc>
-                <a:spcPts val="1820"/>
-              </a:lnSpc>
-              <a:spcBef>
-                <a:spcPts val="300"/>
-              </a:spcBef>
-              <a:spcAft>
-                <a:spcPts val="300"/>
-              </a:spcAft>
-              <a:buNone/>
-            </a:pPr>
-            <a:r>
-              <a:rPr lang="en-US" sz="1300" dirty="0">
-                <a:solidFill>
-                  <a:srgbClr val="2C2C2C"/>
-                </a:solidFill>
-                <a:latin typeface="Georgia" pitchFamily="34" charset="0"/>
-                <a:ea typeface="Georgia" pitchFamily="34" charset="-122"/>
-                <a:cs typeface="Georgia" pitchFamily="34" charset="-120"/>
-              </a:rPr>
-              <a:t> </a:t>
-            </a:r>
-            <a:pPr algn="l" indent="0" marL="0">
-              <a:lnSpc>
-                <a:spcPts val="1820"/>
-              </a:lnSpc>
-              <a:spcBef>
-                <a:spcPts val="300"/>
-              </a:spcBef>
-              <a:spcAft>
-                <a:spcPts val="300"/>
-              </a:spcAft>
-              <a:buNone/>
-            </a:pPr>
-            <a:r>
-              <a:rPr lang="en-US" sz="1300" i="1" dirty="0">
-                <a:solidFill>
-                  <a:srgbClr val="2C2C2C"/>
-                </a:solidFill>
-                <a:latin typeface="Georgia" pitchFamily="34" charset="0"/>
-                <a:ea typeface="Georgia" pitchFamily="34" charset="-122"/>
-                <a:cs typeface="Georgia" pitchFamily="34" charset="-120"/>
-              </a:rPr>
-              <a:t>Earth and water, fire and air,</a:t>
-            </a:r>
-            <a:pPr algn="l" indent="0" marL="0">
-              <a:lnSpc>
-                <a:spcPts val="1820"/>
-              </a:lnSpc>
-              <a:spcBef>
-                <a:spcPts val="300"/>
-              </a:spcBef>
-              <a:spcAft>
-                <a:spcPts val="300"/>
-              </a:spcAft>
-              <a:buNone/>
-            </a:pPr>
-            <a:r>
-              <a:rPr lang="en-US" sz="1300" dirty="0">
-                <a:solidFill>
-                  <a:srgbClr val="2C2C2C"/>
-                </a:solidFill>
-                <a:latin typeface="Georgia" pitchFamily="34" charset="0"/>
-                <a:ea typeface="Georgia" pitchFamily="34" charset="-122"/>
-                <a:cs typeface="Georgia" pitchFamily="34" charset="-120"/>
-              </a:rPr>
-              <a:t> </a:t>
-            </a:r>
-            <a:pPr algn="l" indent="0" marL="0">
-              <a:lnSpc>
-                <a:spcPts val="1820"/>
-              </a:lnSpc>
-              <a:spcBef>
-                <a:spcPts val="300"/>
-              </a:spcBef>
-              <a:spcAft>
-                <a:spcPts val="300"/>
-              </a:spcAft>
-              <a:buNone/>
-            </a:pPr>
-            <a:r>
-              <a:rPr lang="en-US" sz="1300" i="1" dirty="0">
-                <a:solidFill>
-                  <a:srgbClr val="2C2C2C"/>
-                </a:solidFill>
-                <a:latin typeface="Georgia" pitchFamily="34" charset="0"/>
-                <a:ea typeface="Georgia" pitchFamily="34" charset="-122"/>
-                <a:cs typeface="Georgia" pitchFamily="34" charset="-120"/>
-              </a:rPr>
-              <a:t>And the space that's everywhere.</a:t>
-            </a:r>
-            <a:endParaRPr lang="en-US" sz="1300" dirty="0"/>
-          </a:p>
-        </p:txBody>
-      </p:sp>
-      <p:sp>
-        <p:nvSpPr>
-          <p:cNvPr id="9" name="Text 7"/>
-          <p:cNvSpPr/>
-          <p:nvPr/>
-        </p:nvSpPr>
-        <p:spPr>
-          <a:xfrm>
-            <a:off x="406301" y="2607618"/>
-            <a:ext cx="8498026" cy="213271"/>
-          </a:xfrm>
-          <a:prstGeom prst="rect">
-            <a:avLst/>
-          </a:prstGeom>
-          <a:noFill/>
-          <a:ln/>
-        </p:spPr>
-        <p:txBody>
-          <a:bodyPr wrap="square" lIns="0" tIns="0" rIns="0" bIns="0" rtlCol="0" anchor="t"/>
-          <a:lstStyle/>
-          <a:p>
-            <a:pPr algn="l" indent="0" marL="0">
-              <a:lnSpc>
-                <a:spcPts val="1680"/>
-              </a:lnSpc>
-              <a:spcBef>
-                <a:spcPts val="300"/>
-              </a:spcBef>
-              <a:spcAft>
-                <a:spcPts val="300"/>
-              </a:spcAft>
-              <a:buNone/>
-            </a:pPr>
-            <a:r>
-              <a:rPr lang="en-US" sz="1200" dirty="0">
-                <a:solidFill>
-                  <a:srgbClr val="2C2C2C"/>
-                </a:solidFill>
-                <a:latin typeface="Verdana" pitchFamily="34" charset="0"/>
-                <a:ea typeface="Verdana" pitchFamily="34" charset="-122"/>
-                <a:cs typeface="Verdana" pitchFamily="34" charset="-120"/>
-              </a:rPr>
-              <a:t>Verse 2 (optional, slightly older children):</a:t>
-            </a:r>
-            <a:endParaRPr lang="en-US" sz="1200" dirty="0"/>
-          </a:p>
-        </p:txBody>
-      </p:sp>
-      <p:sp>
-        <p:nvSpPr>
-          <p:cNvPr id="10" name="Text 8"/>
-          <p:cNvSpPr/>
-          <p:nvPr/>
-        </p:nvSpPr>
-        <p:spPr>
-          <a:xfrm>
-            <a:off x="406301" y="2909739"/>
-            <a:ext cx="8331398" cy="842963"/>
-          </a:xfrm>
-          <a:prstGeom prst="rect">
-            <a:avLst/>
-          </a:prstGeom>
-          <a:solidFill>
-            <a:srgbClr val="FFFFFF"/>
-          </a:solidFill>
-          <a:ln/>
-        </p:spPr>
-        <p:txBody>
-          <a:bodyPr wrap="square" rtlCol="0" anchor="ctr"/>
-          <a:lstStyle/>
-          <a:p>
-            <a:pPr indent="0" marL="0">
-              <a:buNone/>
-            </a:pPr>
-            <a:endParaRPr lang="en-US" dirty="0"/>
-          </a:p>
-        </p:txBody>
-      </p:sp>
-      <p:sp>
-        <p:nvSpPr>
-          <p:cNvPr id="11" name="Shape 9"/>
-          <p:cNvSpPr/>
-          <p:nvPr/>
-        </p:nvSpPr>
-        <p:spPr>
-          <a:xfrm>
-            <a:off x="434876" y="2909739"/>
-            <a:ext cx="0" cy="842963"/>
-          </a:xfrm>
-          <a:prstGeom prst="line">
-            <a:avLst/>
-          </a:prstGeom>
-          <a:noFill/>
-          <a:ln w="57150">
-            <a:solidFill>
-              <a:srgbClr val="E07A5F"/>
-            </a:solidFill>
-            <a:prstDash val="solid"/>
-          </a:ln>
-        </p:spPr>
-      </p:sp>
-      <p:sp>
-        <p:nvSpPr>
-          <p:cNvPr id="12" name="Text 10"/>
-          <p:cNvSpPr/>
-          <p:nvPr/>
-        </p:nvSpPr>
-        <p:spPr>
-          <a:xfrm>
-            <a:off x="692051" y="3100239"/>
-            <a:ext cx="7973389" cy="461963"/>
-          </a:xfrm>
-          <a:prstGeom prst="rect">
-            <a:avLst/>
-          </a:prstGeom>
-          <a:noFill/>
-          <a:ln/>
-        </p:spPr>
-        <p:txBody>
-          <a:bodyPr wrap="square" lIns="0" tIns="0" rIns="0" bIns="0" rtlCol="0" anchor="t"/>
-          <a:lstStyle/>
-          <a:p>
-            <a:pPr algn="l" indent="0" marL="0">
-              <a:lnSpc>
-                <a:spcPts val="1820"/>
-              </a:lnSpc>
-              <a:spcBef>
-                <a:spcPts val="300"/>
-              </a:spcBef>
-              <a:spcAft>
-                <a:spcPts val="300"/>
-              </a:spcAft>
-              <a:buNone/>
-            </a:pPr>
-            <a:r>
-              <a:rPr lang="en-US" sz="1300" i="1" dirty="0">
-                <a:solidFill>
-                  <a:srgbClr val="2C2C2C"/>
-                </a:solidFill>
-                <a:latin typeface="Georgia" pitchFamily="34" charset="0"/>
-                <a:ea typeface="Georgia" pitchFamily="34" charset="-122"/>
-                <a:cs typeface="Georgia" pitchFamily="34" charset="-120"/>
-              </a:rPr>
-              <a:t>Pṛthvī holds us, ap flows free,</a:t>
-            </a:r>
-            <a:pPr algn="l" indent="0" marL="0">
-              <a:lnSpc>
-                <a:spcPts val="1820"/>
-              </a:lnSpc>
-              <a:spcBef>
-                <a:spcPts val="300"/>
-              </a:spcBef>
-              <a:spcAft>
-                <a:spcPts val="300"/>
-              </a:spcAft>
-              <a:buNone/>
-            </a:pPr>
-            <a:r>
-              <a:rPr lang="en-US" sz="1300" dirty="0">
-                <a:solidFill>
-                  <a:srgbClr val="2C2C2C"/>
-                </a:solidFill>
-                <a:latin typeface="Georgia" pitchFamily="34" charset="0"/>
-                <a:ea typeface="Georgia" pitchFamily="34" charset="-122"/>
-                <a:cs typeface="Georgia" pitchFamily="34" charset="-120"/>
-              </a:rPr>
-              <a:t> </a:t>
-            </a:r>
-            <a:pPr algn="l" indent="0" marL="0">
-              <a:lnSpc>
-                <a:spcPts val="1820"/>
-              </a:lnSpc>
-              <a:spcBef>
-                <a:spcPts val="300"/>
-              </a:spcBef>
-              <a:spcAft>
-                <a:spcPts val="300"/>
-              </a:spcAft>
-              <a:buNone/>
-            </a:pPr>
-            <a:r>
-              <a:rPr lang="en-US" sz="1300" i="1" dirty="0">
-                <a:solidFill>
-                  <a:srgbClr val="2C2C2C"/>
-                </a:solidFill>
-                <a:latin typeface="Georgia" pitchFamily="34" charset="0"/>
-                <a:ea typeface="Georgia" pitchFamily="34" charset="-122"/>
-                <a:cs typeface="Georgia" pitchFamily="34" charset="-120"/>
-              </a:rPr>
-              <a:t>Tejas warms us, vāyu's breeze,</a:t>
-            </a:r>
-            <a:pPr algn="l" indent="0" marL="0">
-              <a:lnSpc>
-                <a:spcPts val="1820"/>
-              </a:lnSpc>
-              <a:spcBef>
-                <a:spcPts val="300"/>
-              </a:spcBef>
-              <a:spcAft>
-                <a:spcPts val="300"/>
-              </a:spcAft>
-              <a:buNone/>
-            </a:pPr>
-            <a:r>
-              <a:rPr lang="en-US" sz="1300" dirty="0">
-                <a:solidFill>
-                  <a:srgbClr val="2C2C2C"/>
-                </a:solidFill>
-                <a:latin typeface="Georgia" pitchFamily="34" charset="0"/>
-                <a:ea typeface="Georgia" pitchFamily="34" charset="-122"/>
-                <a:cs typeface="Georgia" pitchFamily="34" charset="-120"/>
-              </a:rPr>
-              <a:t> </a:t>
-            </a:r>
-            <a:pPr algn="l" indent="0" marL="0">
-              <a:lnSpc>
-                <a:spcPts val="1820"/>
-              </a:lnSpc>
-              <a:spcBef>
-                <a:spcPts val="300"/>
-              </a:spcBef>
-              <a:spcAft>
-                <a:spcPts val="300"/>
-              </a:spcAft>
-              <a:buNone/>
-            </a:pPr>
-            <a:r>
-              <a:rPr lang="en-US" sz="1300" i="1" dirty="0">
-                <a:solidFill>
-                  <a:srgbClr val="2C2C2C"/>
-                </a:solidFill>
-                <a:latin typeface="Georgia" pitchFamily="34" charset="0"/>
-                <a:ea typeface="Georgia" pitchFamily="34" charset="-122"/>
-                <a:cs typeface="Georgia" pitchFamily="34" charset="-120"/>
-              </a:rPr>
-              <a:t>Ākāśa makes the room for all,</a:t>
-            </a:r>
-            <a:pPr algn="l" indent="0" marL="0">
-              <a:lnSpc>
-                <a:spcPts val="1820"/>
-              </a:lnSpc>
-              <a:spcBef>
-                <a:spcPts val="300"/>
-              </a:spcBef>
-              <a:spcAft>
-                <a:spcPts val="300"/>
-              </a:spcAft>
-              <a:buNone/>
-            </a:pPr>
-            <a:r>
-              <a:rPr lang="en-US" sz="1300" dirty="0">
-                <a:solidFill>
-                  <a:srgbClr val="2C2C2C"/>
-                </a:solidFill>
-                <a:latin typeface="Georgia" pitchFamily="34" charset="0"/>
-                <a:ea typeface="Georgia" pitchFamily="34" charset="-122"/>
-                <a:cs typeface="Georgia" pitchFamily="34" charset="-120"/>
-              </a:rPr>
-              <a:t> </a:t>
-            </a:r>
-            <a:pPr algn="l" indent="0" marL="0">
-              <a:lnSpc>
-                <a:spcPts val="1820"/>
-              </a:lnSpc>
-              <a:spcBef>
-                <a:spcPts val="300"/>
-              </a:spcBef>
-              <a:spcAft>
-                <a:spcPts val="300"/>
-              </a:spcAft>
-              <a:buNone/>
-            </a:pPr>
-            <a:r>
-              <a:rPr lang="en-US" sz="1300" i="1" dirty="0">
-                <a:solidFill>
-                  <a:srgbClr val="2C2C2C"/>
-                </a:solidFill>
-                <a:latin typeface="Georgia" pitchFamily="34" charset="0"/>
-                <a:ea typeface="Georgia" pitchFamily="34" charset="-122"/>
-                <a:cs typeface="Georgia" pitchFamily="34" charset="-120"/>
-              </a:rPr>
-              <a:t>Five friends standing tall.</a:t>
-            </a:r>
-            <a:endParaRPr lang="en-US" sz="1300" dirty="0"/>
-          </a:p>
-        </p:txBody>
-      </p:sp>
-      <p:sp>
-        <p:nvSpPr>
-          <p:cNvPr id="13" name="Text 11"/>
-          <p:cNvSpPr/>
-          <p:nvPr/>
-        </p:nvSpPr>
-        <p:spPr>
-          <a:xfrm>
-            <a:off x="406301" y="3841552"/>
-            <a:ext cx="8498026" cy="213271"/>
-          </a:xfrm>
-          <a:prstGeom prst="rect">
-            <a:avLst/>
-          </a:prstGeom>
-          <a:noFill/>
-          <a:ln/>
-        </p:spPr>
-        <p:txBody>
-          <a:bodyPr wrap="square" lIns="0" tIns="0" rIns="0" bIns="0" rtlCol="0" anchor="t"/>
-          <a:lstStyle/>
-          <a:p>
-            <a:pPr algn="l" indent="0" marL="0">
-              <a:lnSpc>
-                <a:spcPts val="1680"/>
-              </a:lnSpc>
-              <a:spcBef>
-                <a:spcPts val="300"/>
-              </a:spcBef>
-              <a:spcAft>
-                <a:spcPts val="300"/>
-              </a:spcAft>
-              <a:buNone/>
-            </a:pPr>
-            <a:r>
-              <a:rPr lang="en-US" sz="1200" dirty="0">
-                <a:solidFill>
-                  <a:srgbClr val="2C2C2C"/>
-                </a:solidFill>
-                <a:latin typeface="Verdana" pitchFamily="34" charset="0"/>
-                <a:ea typeface="Verdana" pitchFamily="34" charset="-122"/>
-                <a:cs typeface="Verdana" pitchFamily="34" charset="-120"/>
-              </a:rPr>
-              <a:t>Sing 3 times. Add claps on the Sanskrit names.</a:t>
-            </a:r>
-            <a:endParaRPr lang="en-US" sz="1200" dirty="0"/>
-          </a:p>
-        </p:txBody>
-      </p:sp>
-      <p:sp>
-        <p:nvSpPr>
-          <p:cNvPr id="14" name="Text 12"/>
           <p:cNvSpPr/>
           <p:nvPr/>
         </p:nvSpPr>
@@ -4215,7 +4031,7 @@
                 <a:ea typeface="Georgia" pitchFamily="34" charset="-122"/>
                 <a:cs typeface="Georgia" pitchFamily="34" charset="-120"/>
               </a:rPr>
-              <a:t>Recall game (10 min)</a:t>
+              <a:t>Song (10 min)</a:t>
             </a:r>
             <a:endParaRPr lang="en-US" sz="1800" dirty="0"/>
           </a:p>
@@ -4230,7 +4046,7 @@
         <p:spPr>
           <a:xfrm>
             <a:off x="406301" y="870942"/>
-            <a:ext cx="8498026" cy="213271"/>
+            <a:ext cx="8498026" cy="426541"/>
           </a:xfrm>
           <a:prstGeom prst="rect">
             <a:avLst/>
@@ -4263,33 +4079,8 @@
                 <a:ea typeface="Verdana" pitchFamily="34" charset="-122"/>
                 <a:cs typeface="Verdana" pitchFamily="34" charset="-120"/>
               </a:rPr>
-              <a:t>Hold up each picture card. Class chants the Sanskrit name.</a:t>
-            </a:r>
-            <a:endParaRPr lang="en-US" sz="1200" dirty="0"/>
-          </a:p>
-        </p:txBody>
-      </p:sp>
-      <p:sp>
-        <p:nvSpPr>
-          <p:cNvPr id="5" name="Text 3"/>
-          <p:cNvSpPr/>
-          <p:nvPr/>
-        </p:nvSpPr>
-        <p:spPr>
-          <a:xfrm>
-            <a:off x="406301" y="1160413"/>
-            <a:ext cx="8498026" cy="213271"/>
-          </a:xfrm>
-          <a:prstGeom prst="rect">
-            <a:avLst/>
-          </a:prstGeom>
-          <a:noFill/>
-          <a:ln/>
-        </p:spPr>
-        <p:txBody>
-          <a:bodyPr wrap="square" lIns="0" tIns="0" rIns="0" bIns="0" rtlCol="0" anchor="t"/>
-          <a:lstStyle/>
-          <a:p>
+              <a:t>Teach a simple tune to the chant. Suggested tune: </a:t>
+            </a:r>
             <a:pPr algn="l" indent="0" marL="0">
               <a:lnSpc>
                 <a:spcPts val="1680"/>
@@ -4303,7 +4094,7 @@
               <a:buNone/>
             </a:pPr>
             <a:r>
-              <a:rPr lang="en-US" sz="1200" dirty="0">
+              <a:rPr lang="en-US" sz="1200" i="1" dirty="0">
                 <a:solidFill>
                   <a:srgbClr val="2C2C2C"/>
                 </a:solidFill>
@@ -4311,33 +4102,8 @@
                 <a:ea typeface="Verdana" pitchFamily="34" charset="-122"/>
                 <a:cs typeface="Verdana" pitchFamily="34" charset="-120"/>
               </a:rPr>
-              <a:t>Then turn the card face-down. Class chants the Sanskrit name from memory.</a:t>
-            </a:r>
-            <a:endParaRPr lang="en-US" sz="1200" dirty="0"/>
-          </a:p>
-        </p:txBody>
-      </p:sp>
-      <p:sp>
-        <p:nvSpPr>
-          <p:cNvPr id="6" name="Text 4"/>
-          <p:cNvSpPr/>
-          <p:nvPr/>
-        </p:nvSpPr>
-        <p:spPr>
-          <a:xfrm>
-            <a:off x="406301" y="1449884"/>
-            <a:ext cx="8498026" cy="213271"/>
-          </a:xfrm>
-          <a:prstGeom prst="rect">
-            <a:avLst/>
-          </a:prstGeom>
-          <a:noFill/>
-          <a:ln/>
-        </p:spPr>
-        <p:txBody>
-          <a:bodyPr wrap="square" lIns="0" tIns="0" rIns="0" bIns="0" rtlCol="0" anchor="t"/>
-          <a:lstStyle/>
-          <a:p>
+              <a:t>"Twinkle Twinkle Little Star"</a:t>
+            </a:r>
             <a:pPr algn="l" indent="0" marL="0">
               <a:lnSpc>
                 <a:spcPts val="1680"/>
@@ -4359,7 +4125,7 @@
                 <a:ea typeface="Verdana" pitchFamily="34" charset="-122"/>
                 <a:cs typeface="Verdana" pitchFamily="34" charset="-120"/>
               </a:rPr>
-              <a:t>Then mix the order. Class chants whichever name you point to.</a:t>
+              <a:t> (any familiar nursery tune works).</a:t>
             </a:r>
             <a:endParaRPr lang="en-US" sz="1200" dirty="0"/>
           </a:p>
@@ -4367,7 +4133,294 @@
       </p:sp>
       <p:sp>
         <p:nvSpPr>
-          <p:cNvPr id="7" name="Text 5"/>
+          <p:cNvPr id="5" name="Text 3"/>
+          <p:cNvSpPr/>
+          <p:nvPr/>
+        </p:nvSpPr>
+        <p:spPr>
+          <a:xfrm>
+            <a:off x="406301" y="1373684"/>
+            <a:ext cx="8498026" cy="213271"/>
+          </a:xfrm>
+          <a:prstGeom prst="rect">
+            <a:avLst/>
+          </a:prstGeom>
+          <a:noFill/>
+          <a:ln/>
+        </p:spPr>
+        <p:txBody>
+          <a:bodyPr wrap="square" lIns="0" tIns="0" rIns="0" bIns="0" rtlCol="0" anchor="t"/>
+          <a:lstStyle/>
+          <a:p>
+            <a:pPr algn="l" indent="0" marL="0">
+              <a:lnSpc>
+                <a:spcPts val="1680"/>
+              </a:lnSpc>
+              <a:spcBef>
+                <a:spcPts val="300"/>
+              </a:spcBef>
+              <a:spcAft>
+                <a:spcPts val="300"/>
+              </a:spcAft>
+              <a:buNone/>
+            </a:pPr>
+            <a:r>
+              <a:rPr lang="en-US" sz="1200" dirty="0">
+                <a:solidFill>
+                  <a:srgbClr val="2C2C2C"/>
+                </a:solidFill>
+                <a:latin typeface="Verdana" pitchFamily="34" charset="0"/>
+                <a:ea typeface="Verdana" pitchFamily="34" charset="-122"/>
+                <a:cs typeface="Verdana" pitchFamily="34" charset="-120"/>
+              </a:rPr>
+              <a:t>Verse 1:</a:t>
+            </a:r>
+            <a:endParaRPr lang="en-US" sz="1200" dirty="0"/>
+          </a:p>
+        </p:txBody>
+      </p:sp>
+      <p:sp>
+        <p:nvSpPr>
+          <p:cNvPr id="6" name="Text 4"/>
+          <p:cNvSpPr/>
+          <p:nvPr/>
+        </p:nvSpPr>
+        <p:spPr>
+          <a:xfrm>
+            <a:off x="406301" y="1675805"/>
+            <a:ext cx="8331398" cy="842963"/>
+          </a:xfrm>
+          <a:prstGeom prst="rect">
+            <a:avLst/>
+          </a:prstGeom>
+          <a:solidFill>
+            <a:srgbClr val="FFFFFF"/>
+          </a:solidFill>
+          <a:ln/>
+        </p:spPr>
+        <p:txBody>
+          <a:bodyPr wrap="square" rtlCol="0" anchor="ctr"/>
+          <a:lstStyle/>
+          <a:p>
+            <a:pPr indent="0" marL="0">
+              <a:buNone/>
+            </a:pPr>
+            <a:endParaRPr lang="en-US" dirty="0"/>
+          </a:p>
+        </p:txBody>
+      </p:sp>
+      <p:sp>
+        <p:nvSpPr>
+          <p:cNvPr id="7" name="Shape 5"/>
+          <p:cNvSpPr/>
+          <p:nvPr/>
+        </p:nvSpPr>
+        <p:spPr>
+          <a:xfrm>
+            <a:off x="434876" y="1675805"/>
+            <a:ext cx="0" cy="842963"/>
+          </a:xfrm>
+          <a:prstGeom prst="line">
+            <a:avLst/>
+          </a:prstGeom>
+          <a:noFill/>
+          <a:ln w="57150">
+            <a:solidFill>
+              <a:srgbClr val="E07A5F"/>
+            </a:solidFill>
+            <a:prstDash val="solid"/>
+          </a:ln>
+        </p:spPr>
+      </p:sp>
+      <p:sp>
+        <p:nvSpPr>
+          <p:cNvPr id="8" name="Text 6"/>
+          <p:cNvSpPr/>
+          <p:nvPr/>
+        </p:nvSpPr>
+        <p:spPr>
+          <a:xfrm>
+            <a:off x="692051" y="1866305"/>
+            <a:ext cx="7973389" cy="461963"/>
+          </a:xfrm>
+          <a:prstGeom prst="rect">
+            <a:avLst/>
+          </a:prstGeom>
+          <a:noFill/>
+          <a:ln/>
+        </p:spPr>
+        <p:txBody>
+          <a:bodyPr wrap="square" lIns="0" tIns="0" rIns="0" bIns="0" rtlCol="0" anchor="t"/>
+          <a:lstStyle/>
+          <a:p>
+            <a:pPr algn="l" indent="0" marL="0">
+              <a:lnSpc>
+                <a:spcPts val="1820"/>
+              </a:lnSpc>
+              <a:spcBef>
+                <a:spcPts val="300"/>
+              </a:spcBef>
+              <a:spcAft>
+                <a:spcPts val="300"/>
+              </a:spcAft>
+              <a:buNone/>
+            </a:pPr>
+            <a:r>
+              <a:rPr lang="en-US" sz="1300" i="1" dirty="0">
+                <a:solidFill>
+                  <a:srgbClr val="2C2C2C"/>
+                </a:solidFill>
+                <a:latin typeface="Georgia" pitchFamily="34" charset="0"/>
+                <a:ea typeface="Georgia" pitchFamily="34" charset="-122"/>
+                <a:cs typeface="Georgia" pitchFamily="34" charset="-120"/>
+              </a:rPr>
+              <a:t>Pṛthvī, ap, tejas, vāyu, ākāśa</a:t>
+            </a:r>
+            <a:pPr algn="l" indent="0" marL="0">
+              <a:lnSpc>
+                <a:spcPts val="1820"/>
+              </a:lnSpc>
+              <a:spcBef>
+                <a:spcPts val="300"/>
+              </a:spcBef>
+              <a:spcAft>
+                <a:spcPts val="300"/>
+              </a:spcAft>
+              <a:buNone/>
+            </a:pPr>
+            <a:r>
+              <a:rPr lang="en-US" sz="1300" dirty="0">
+                <a:solidFill>
+                  <a:srgbClr val="2C2C2C"/>
+                </a:solidFill>
+                <a:latin typeface="Georgia" pitchFamily="34" charset="0"/>
+                <a:ea typeface="Georgia" pitchFamily="34" charset="-122"/>
+                <a:cs typeface="Georgia" pitchFamily="34" charset="-120"/>
+              </a:rPr>
+              <a:t> </a:t>
+            </a:r>
+            <a:pPr algn="l" indent="0" marL="0">
+              <a:lnSpc>
+                <a:spcPts val="1820"/>
+              </a:lnSpc>
+              <a:spcBef>
+                <a:spcPts val="300"/>
+              </a:spcBef>
+              <a:spcAft>
+                <a:spcPts val="300"/>
+              </a:spcAft>
+              <a:buNone/>
+            </a:pPr>
+            <a:r>
+              <a:rPr lang="en-US" sz="1300" i="1" dirty="0">
+                <a:solidFill>
+                  <a:srgbClr val="2C2C2C"/>
+                </a:solidFill>
+                <a:latin typeface="Georgia" pitchFamily="34" charset="0"/>
+                <a:ea typeface="Georgia" pitchFamily="34" charset="-122"/>
+                <a:cs typeface="Georgia" pitchFamily="34" charset="-120"/>
+              </a:rPr>
+              <a:t>Five great friends are everywhere</a:t>
+            </a:r>
+            <a:pPr algn="l" indent="0" marL="0">
+              <a:lnSpc>
+                <a:spcPts val="1820"/>
+              </a:lnSpc>
+              <a:spcBef>
+                <a:spcPts val="300"/>
+              </a:spcBef>
+              <a:spcAft>
+                <a:spcPts val="300"/>
+              </a:spcAft>
+              <a:buNone/>
+            </a:pPr>
+            <a:r>
+              <a:rPr lang="en-US" sz="1300" dirty="0">
+                <a:solidFill>
+                  <a:srgbClr val="2C2C2C"/>
+                </a:solidFill>
+                <a:latin typeface="Georgia" pitchFamily="34" charset="0"/>
+                <a:ea typeface="Georgia" pitchFamily="34" charset="-122"/>
+                <a:cs typeface="Georgia" pitchFamily="34" charset="-120"/>
+              </a:rPr>
+              <a:t> </a:t>
+            </a:r>
+            <a:pPr algn="l" indent="0" marL="0">
+              <a:lnSpc>
+                <a:spcPts val="1820"/>
+              </a:lnSpc>
+              <a:spcBef>
+                <a:spcPts val="300"/>
+              </a:spcBef>
+              <a:spcAft>
+                <a:spcPts val="300"/>
+              </a:spcAft>
+              <a:buNone/>
+            </a:pPr>
+            <a:r>
+              <a:rPr lang="en-US" sz="1300" i="1" dirty="0">
+                <a:solidFill>
+                  <a:srgbClr val="2C2C2C"/>
+                </a:solidFill>
+                <a:latin typeface="Georgia" pitchFamily="34" charset="0"/>
+                <a:ea typeface="Georgia" pitchFamily="34" charset="-122"/>
+                <a:cs typeface="Georgia" pitchFamily="34" charset="-120"/>
+              </a:rPr>
+              <a:t>Earth and water, fire and air,</a:t>
+            </a:r>
+            <a:pPr algn="l" indent="0" marL="0">
+              <a:lnSpc>
+                <a:spcPts val="1820"/>
+              </a:lnSpc>
+              <a:spcBef>
+                <a:spcPts val="300"/>
+              </a:spcBef>
+              <a:spcAft>
+                <a:spcPts val="300"/>
+              </a:spcAft>
+              <a:buNone/>
+            </a:pPr>
+            <a:r>
+              <a:rPr lang="en-US" sz="1300" dirty="0">
+                <a:solidFill>
+                  <a:srgbClr val="2C2C2C"/>
+                </a:solidFill>
+                <a:latin typeface="Georgia" pitchFamily="34" charset="0"/>
+                <a:ea typeface="Georgia" pitchFamily="34" charset="-122"/>
+                <a:cs typeface="Georgia" pitchFamily="34" charset="-120"/>
+              </a:rPr>
+              <a:t> </a:t>
+            </a:r>
+            <a:pPr algn="l" indent="0" marL="0">
+              <a:lnSpc>
+                <a:spcPts val="1820"/>
+              </a:lnSpc>
+              <a:spcBef>
+                <a:spcPts val="300"/>
+              </a:spcBef>
+              <a:spcAft>
+                <a:spcPts val="300"/>
+              </a:spcAft>
+              <a:buNone/>
+            </a:pPr>
+            <a:r>
+              <a:rPr lang="en-US" sz="1300" i="1" dirty="0">
+                <a:solidFill>
+                  <a:srgbClr val="2C2C2C"/>
+                </a:solidFill>
+                <a:latin typeface="Georgia" pitchFamily="34" charset="0"/>
+                <a:ea typeface="Georgia" pitchFamily="34" charset="-122"/>
+                <a:cs typeface="Georgia" pitchFamily="34" charset="-120"/>
+              </a:rPr>
+              <a:t>And the space that's everywhere.</a:t>
+            </a:r>
+            <a:endParaRPr lang="en-US" sz="1300" dirty="0"/>
+          </a:p>
+        </p:txBody>
+      </p:sp>
+      <p:sp>
+        <p:nvSpPr>
+          <p:cNvPr id="9" name="Text 7"/>
           <p:cNvSpPr/>
           <p:nvPr/>
         </p:nvSpPr>
@@ -4517,7 +4570,7 @@
                 <a:ea typeface="Georgia" pitchFamily="34" charset="-122"/>
                 <a:cs typeface="Georgia" pitchFamily="34" charset="-120"/>
               </a:rPr>
-              <a:t>Drawing / quiet time (10 min)</a:t>
+              <a:t>Song (10 min) (cont.)</a:t>
             </a:r>
             <a:endParaRPr lang="en-US" sz="1800" dirty="0"/>
           </a:p>
@@ -4532,7 +4585,7 @@
         <p:spPr>
           <a:xfrm>
             <a:off x="406301" y="870942"/>
-            <a:ext cx="8498026" cy="426541"/>
+            <a:ext cx="8498026" cy="213271"/>
           </a:xfrm>
           <a:prstGeom prst="rect">
             <a:avLst/>
@@ -4565,7 +4618,7 @@
                 <a:ea typeface="Verdana" pitchFamily="34" charset="-122"/>
                 <a:cs typeface="Verdana" pitchFamily="34" charset="-120"/>
               </a:rPr>
-              <a:t>Each child completes a drawing book entry: – 5 small boxes on one page. – One element name in each box (teacher helps). – One small picture in each box.</a:t>
+              <a:t>Verse 2 (optional, slightly older children):</a:t>
             </a:r>
             <a:endParaRPr lang="en-US" sz="1200" dirty="0"/>
           </a:p>
@@ -4574,6 +4627,293 @@
       <p:sp>
         <p:nvSpPr>
           <p:cNvPr id="5" name="Text 3"/>
+          <p:cNvSpPr/>
+          <p:nvPr/>
+        </p:nvSpPr>
+        <p:spPr>
+          <a:xfrm>
+            <a:off x="406301" y="1173063"/>
+            <a:ext cx="8331398" cy="842963"/>
+          </a:xfrm>
+          <a:prstGeom prst="rect">
+            <a:avLst/>
+          </a:prstGeom>
+          <a:solidFill>
+            <a:srgbClr val="FFFFFF"/>
+          </a:solidFill>
+          <a:ln/>
+        </p:spPr>
+        <p:txBody>
+          <a:bodyPr wrap="square" rtlCol="0" anchor="ctr"/>
+          <a:lstStyle/>
+          <a:p>
+            <a:pPr indent="0" marL="0">
+              <a:buNone/>
+            </a:pPr>
+            <a:endParaRPr lang="en-US" dirty="0"/>
+          </a:p>
+        </p:txBody>
+      </p:sp>
+      <p:sp>
+        <p:nvSpPr>
+          <p:cNvPr id="6" name="Shape 4"/>
+          <p:cNvSpPr/>
+          <p:nvPr/>
+        </p:nvSpPr>
+        <p:spPr>
+          <a:xfrm>
+            <a:off x="434876" y="1173063"/>
+            <a:ext cx="0" cy="842963"/>
+          </a:xfrm>
+          <a:prstGeom prst="line">
+            <a:avLst/>
+          </a:prstGeom>
+          <a:noFill/>
+          <a:ln w="57150">
+            <a:solidFill>
+              <a:srgbClr val="E07A5F"/>
+            </a:solidFill>
+            <a:prstDash val="solid"/>
+          </a:ln>
+        </p:spPr>
+      </p:sp>
+      <p:sp>
+        <p:nvSpPr>
+          <p:cNvPr id="7" name="Text 5"/>
+          <p:cNvSpPr/>
+          <p:nvPr/>
+        </p:nvSpPr>
+        <p:spPr>
+          <a:xfrm>
+            <a:off x="692051" y="1363563"/>
+            <a:ext cx="7973389" cy="461963"/>
+          </a:xfrm>
+          <a:prstGeom prst="rect">
+            <a:avLst/>
+          </a:prstGeom>
+          <a:noFill/>
+          <a:ln/>
+        </p:spPr>
+        <p:txBody>
+          <a:bodyPr wrap="square" lIns="0" tIns="0" rIns="0" bIns="0" rtlCol="0" anchor="t"/>
+          <a:lstStyle/>
+          <a:p>
+            <a:pPr algn="l" indent="0" marL="0">
+              <a:lnSpc>
+                <a:spcPts val="1820"/>
+              </a:lnSpc>
+              <a:spcBef>
+                <a:spcPts val="300"/>
+              </a:spcBef>
+              <a:spcAft>
+                <a:spcPts val="300"/>
+              </a:spcAft>
+              <a:buNone/>
+            </a:pPr>
+            <a:r>
+              <a:rPr lang="en-US" sz="1300" i="1" dirty="0">
+                <a:solidFill>
+                  <a:srgbClr val="2C2C2C"/>
+                </a:solidFill>
+                <a:latin typeface="Georgia" pitchFamily="34" charset="0"/>
+                <a:ea typeface="Georgia" pitchFamily="34" charset="-122"/>
+                <a:cs typeface="Georgia" pitchFamily="34" charset="-120"/>
+              </a:rPr>
+              <a:t>Pṛthvī holds us, ap flows free,</a:t>
+            </a:r>
+            <a:pPr algn="l" indent="0" marL="0">
+              <a:lnSpc>
+                <a:spcPts val="1820"/>
+              </a:lnSpc>
+              <a:spcBef>
+                <a:spcPts val="300"/>
+              </a:spcBef>
+              <a:spcAft>
+                <a:spcPts val="300"/>
+              </a:spcAft>
+              <a:buNone/>
+            </a:pPr>
+            <a:r>
+              <a:rPr lang="en-US" sz="1300" dirty="0">
+                <a:solidFill>
+                  <a:srgbClr val="2C2C2C"/>
+                </a:solidFill>
+                <a:latin typeface="Georgia" pitchFamily="34" charset="0"/>
+                <a:ea typeface="Georgia" pitchFamily="34" charset="-122"/>
+                <a:cs typeface="Georgia" pitchFamily="34" charset="-120"/>
+              </a:rPr>
+              <a:t> </a:t>
+            </a:r>
+            <a:pPr algn="l" indent="0" marL="0">
+              <a:lnSpc>
+                <a:spcPts val="1820"/>
+              </a:lnSpc>
+              <a:spcBef>
+                <a:spcPts val="300"/>
+              </a:spcBef>
+              <a:spcAft>
+                <a:spcPts val="300"/>
+              </a:spcAft>
+              <a:buNone/>
+            </a:pPr>
+            <a:r>
+              <a:rPr lang="en-US" sz="1300" i="1" dirty="0">
+                <a:solidFill>
+                  <a:srgbClr val="2C2C2C"/>
+                </a:solidFill>
+                <a:latin typeface="Georgia" pitchFamily="34" charset="0"/>
+                <a:ea typeface="Georgia" pitchFamily="34" charset="-122"/>
+                <a:cs typeface="Georgia" pitchFamily="34" charset="-120"/>
+              </a:rPr>
+              <a:t>Tejas warms us, vāyu's breeze,</a:t>
+            </a:r>
+            <a:pPr algn="l" indent="0" marL="0">
+              <a:lnSpc>
+                <a:spcPts val="1820"/>
+              </a:lnSpc>
+              <a:spcBef>
+                <a:spcPts val="300"/>
+              </a:spcBef>
+              <a:spcAft>
+                <a:spcPts val="300"/>
+              </a:spcAft>
+              <a:buNone/>
+            </a:pPr>
+            <a:r>
+              <a:rPr lang="en-US" sz="1300" dirty="0">
+                <a:solidFill>
+                  <a:srgbClr val="2C2C2C"/>
+                </a:solidFill>
+                <a:latin typeface="Georgia" pitchFamily="34" charset="0"/>
+                <a:ea typeface="Georgia" pitchFamily="34" charset="-122"/>
+                <a:cs typeface="Georgia" pitchFamily="34" charset="-120"/>
+              </a:rPr>
+              <a:t> </a:t>
+            </a:r>
+            <a:pPr algn="l" indent="0" marL="0">
+              <a:lnSpc>
+                <a:spcPts val="1820"/>
+              </a:lnSpc>
+              <a:spcBef>
+                <a:spcPts val="300"/>
+              </a:spcBef>
+              <a:spcAft>
+                <a:spcPts val="300"/>
+              </a:spcAft>
+              <a:buNone/>
+            </a:pPr>
+            <a:r>
+              <a:rPr lang="en-US" sz="1300" i="1" dirty="0">
+                <a:solidFill>
+                  <a:srgbClr val="2C2C2C"/>
+                </a:solidFill>
+                <a:latin typeface="Georgia" pitchFamily="34" charset="0"/>
+                <a:ea typeface="Georgia" pitchFamily="34" charset="-122"/>
+                <a:cs typeface="Georgia" pitchFamily="34" charset="-120"/>
+              </a:rPr>
+              <a:t>Ākāśa makes the room for all,</a:t>
+            </a:r>
+            <a:pPr algn="l" indent="0" marL="0">
+              <a:lnSpc>
+                <a:spcPts val="1820"/>
+              </a:lnSpc>
+              <a:spcBef>
+                <a:spcPts val="300"/>
+              </a:spcBef>
+              <a:spcAft>
+                <a:spcPts val="300"/>
+              </a:spcAft>
+              <a:buNone/>
+            </a:pPr>
+            <a:r>
+              <a:rPr lang="en-US" sz="1300" dirty="0">
+                <a:solidFill>
+                  <a:srgbClr val="2C2C2C"/>
+                </a:solidFill>
+                <a:latin typeface="Georgia" pitchFamily="34" charset="0"/>
+                <a:ea typeface="Georgia" pitchFamily="34" charset="-122"/>
+                <a:cs typeface="Georgia" pitchFamily="34" charset="-120"/>
+              </a:rPr>
+              <a:t> </a:t>
+            </a:r>
+            <a:pPr algn="l" indent="0" marL="0">
+              <a:lnSpc>
+                <a:spcPts val="1820"/>
+              </a:lnSpc>
+              <a:spcBef>
+                <a:spcPts val="300"/>
+              </a:spcBef>
+              <a:spcAft>
+                <a:spcPts val="300"/>
+              </a:spcAft>
+              <a:buNone/>
+            </a:pPr>
+            <a:r>
+              <a:rPr lang="en-US" sz="1300" i="1" dirty="0">
+                <a:solidFill>
+                  <a:srgbClr val="2C2C2C"/>
+                </a:solidFill>
+                <a:latin typeface="Georgia" pitchFamily="34" charset="0"/>
+                <a:ea typeface="Georgia" pitchFamily="34" charset="-122"/>
+                <a:cs typeface="Georgia" pitchFamily="34" charset="-120"/>
+              </a:rPr>
+              <a:t>Five friends standing tall.</a:t>
+            </a:r>
+            <a:endParaRPr lang="en-US" sz="1300" dirty="0"/>
+          </a:p>
+        </p:txBody>
+      </p:sp>
+      <p:sp>
+        <p:nvSpPr>
+          <p:cNvPr id="8" name="Text 6"/>
+          <p:cNvSpPr/>
+          <p:nvPr/>
+        </p:nvSpPr>
+        <p:spPr>
+          <a:xfrm>
+            <a:off x="406301" y="2104876"/>
+            <a:ext cx="8498026" cy="213271"/>
+          </a:xfrm>
+          <a:prstGeom prst="rect">
+            <a:avLst/>
+          </a:prstGeom>
+          <a:noFill/>
+          <a:ln/>
+        </p:spPr>
+        <p:txBody>
+          <a:bodyPr wrap="square" lIns="0" tIns="0" rIns="0" bIns="0" rtlCol="0" anchor="t"/>
+          <a:lstStyle/>
+          <a:p>
+            <a:pPr algn="l" indent="0" marL="0">
+              <a:lnSpc>
+                <a:spcPts val="1680"/>
+              </a:lnSpc>
+              <a:spcBef>
+                <a:spcPts val="300"/>
+              </a:spcBef>
+              <a:spcAft>
+                <a:spcPts val="300"/>
+              </a:spcAft>
+              <a:buNone/>
+            </a:pPr>
+            <a:r>
+              <a:rPr lang="en-US" sz="1200" dirty="0">
+                <a:solidFill>
+                  <a:srgbClr val="2C2C2C"/>
+                </a:solidFill>
+                <a:latin typeface="Verdana" pitchFamily="34" charset="0"/>
+                <a:ea typeface="Verdana" pitchFamily="34" charset="-122"/>
+                <a:cs typeface="Verdana" pitchFamily="34" charset="-120"/>
+              </a:rPr>
+              <a:t>Sing 3 times. Add claps on the Sanskrit names.</a:t>
+            </a:r>
+            <a:endParaRPr lang="en-US" sz="1200" dirty="0"/>
+          </a:p>
+        </p:txBody>
+      </p:sp>
+      <p:sp>
+        <p:nvSpPr>
+          <p:cNvPr id="9" name="Text 7"/>
           <p:cNvSpPr/>
           <p:nvPr/>
         </p:nvSpPr>
@@ -4723,7 +5063,7 @@
                 <a:ea typeface="Georgia" pitchFamily="34" charset="-122"/>
                 <a:cs typeface="Georgia" pitchFamily="34" charset="-120"/>
               </a:rPr>
-              <a:t>Show + chant (2 min)</a:t>
+              <a:t>Recall game (10 min)</a:t>
             </a:r>
             <a:endParaRPr lang="en-US" sz="1800" dirty="0"/>
           </a:p>
@@ -4771,7 +5111,7 @@
                 <a:ea typeface="Verdana" pitchFamily="34" charset="-122"/>
                 <a:cs typeface="Verdana" pitchFamily="34" charset="-120"/>
               </a:rPr>
-              <a:t>Hold up the best drawings (without ranking). Close with the song.</a:t>
+              <a:t>Hold up each picture card. Class chants the Sanskrit name.</a:t>
             </a:r>
             <a:endParaRPr lang="en-US" sz="1200" dirty="0"/>
           </a:p>
@@ -4780,6 +5120,102 @@
       <p:sp>
         <p:nvSpPr>
           <p:cNvPr id="5" name="Text 3"/>
+          <p:cNvSpPr/>
+          <p:nvPr/>
+        </p:nvSpPr>
+        <p:spPr>
+          <a:xfrm>
+            <a:off x="406301" y="1160413"/>
+            <a:ext cx="8498026" cy="213271"/>
+          </a:xfrm>
+          <a:prstGeom prst="rect">
+            <a:avLst/>
+          </a:prstGeom>
+          <a:noFill/>
+          <a:ln/>
+        </p:spPr>
+        <p:txBody>
+          <a:bodyPr wrap="square" lIns="0" tIns="0" rIns="0" bIns="0" rtlCol="0" anchor="t"/>
+          <a:lstStyle/>
+          <a:p>
+            <a:pPr algn="l" indent="0" marL="0">
+              <a:lnSpc>
+                <a:spcPts val="1680"/>
+              </a:lnSpc>
+              <a:spcBef>
+                <a:spcPts val="300"/>
+              </a:spcBef>
+              <a:spcAft>
+                <a:spcPts val="300"/>
+              </a:spcAft>
+              <a:buNone/>
+            </a:pPr>
+            <a:r>
+              <a:rPr lang="en-US" sz="1200" dirty="0">
+                <a:solidFill>
+                  <a:srgbClr val="2C2C2C"/>
+                </a:solidFill>
+                <a:latin typeface="Verdana" pitchFamily="34" charset="0"/>
+                <a:ea typeface="Verdana" pitchFamily="34" charset="-122"/>
+                <a:cs typeface="Verdana" pitchFamily="34" charset="-120"/>
+              </a:rPr>
+              <a:t>Then turn the card face-down. Class chants the Sanskrit name from memory.</a:t>
+            </a:r>
+            <a:endParaRPr lang="en-US" sz="1200" dirty="0"/>
+          </a:p>
+        </p:txBody>
+      </p:sp>
+      <p:sp>
+        <p:nvSpPr>
+          <p:cNvPr id="6" name="Text 4"/>
+          <p:cNvSpPr/>
+          <p:nvPr/>
+        </p:nvSpPr>
+        <p:spPr>
+          <a:xfrm>
+            <a:off x="406301" y="1449884"/>
+            <a:ext cx="8498026" cy="213271"/>
+          </a:xfrm>
+          <a:prstGeom prst="rect">
+            <a:avLst/>
+          </a:prstGeom>
+          <a:noFill/>
+          <a:ln/>
+        </p:spPr>
+        <p:txBody>
+          <a:bodyPr wrap="square" lIns="0" tIns="0" rIns="0" bIns="0" rtlCol="0" anchor="t"/>
+          <a:lstStyle/>
+          <a:p>
+            <a:pPr algn="l" indent="0" marL="0">
+              <a:lnSpc>
+                <a:spcPts val="1680"/>
+              </a:lnSpc>
+              <a:spcBef>
+                <a:spcPts val="300"/>
+              </a:spcBef>
+              <a:spcAft>
+                <a:spcPts val="300"/>
+              </a:spcAft>
+              <a:buNone/>
+            </a:pPr>
+            <a:r>
+              <a:rPr lang="en-US" sz="1200" dirty="0">
+                <a:solidFill>
+                  <a:srgbClr val="2C2C2C"/>
+                </a:solidFill>
+                <a:latin typeface="Verdana" pitchFamily="34" charset="0"/>
+                <a:ea typeface="Verdana" pitchFamily="34" charset="-122"/>
+                <a:cs typeface="Verdana" pitchFamily="34" charset="-120"/>
+              </a:rPr>
+              <a:t>Then mix the order. Class chants whichever name you point to.</a:t>
+            </a:r>
+            <a:endParaRPr lang="en-US" sz="1200" dirty="0"/>
+          </a:p>
+        </p:txBody>
+      </p:sp>
+      <p:sp>
+        <p:nvSpPr>
+          <p:cNvPr id="7" name="Text 5"/>
           <p:cNvSpPr/>
           <p:nvPr/>
         </p:nvSpPr>
@@ -4929,7 +5365,7 @@
                 <a:ea typeface="Georgia" pitchFamily="34" charset="-122"/>
                 <a:cs typeface="Georgia" pitchFamily="34" charset="-120"/>
               </a:rPr>
-              <a:t>Homework</a:t>
+              <a:t>Drawing / quiet time (10 min)</a:t>
             </a:r>
             <a:endParaRPr lang="en-US" sz="1800" dirty="0"/>
           </a:p>
@@ -4977,7 +5413,7 @@
                 <a:ea typeface="Verdana" pitchFamily="34" charset="-122"/>
                 <a:cs typeface="Verdana" pitchFamily="34" charset="-120"/>
               </a:rPr>
-              <a:t>– Tomorrow we sort! Bring 2 small objects from home — anything safe and small.</a:t>
+              <a:t>Each child completes a drawing book entry:</a:t>
             </a:r>
             <a:endParaRPr lang="en-US" sz="1200" dirty="0"/>
           </a:p>
@@ -4986,6 +5422,100 @@
       <p:sp>
         <p:nvSpPr>
           <p:cNvPr id="5" name="Text 3"/>
+          <p:cNvSpPr/>
+          <p:nvPr/>
+        </p:nvSpPr>
+        <p:spPr>
+          <a:xfrm>
+            <a:off x="634901" y="1173063"/>
+            <a:ext cx="8102798" cy="769441"/>
+          </a:xfrm>
+          <a:prstGeom prst="rect">
+            <a:avLst/>
+          </a:prstGeom>
+          <a:noFill/>
+          <a:ln/>
+        </p:spPr>
+        <p:txBody>
+          <a:bodyPr wrap="square" lIns="0" tIns="0" rIns="0" bIns="0" rtlCol="0" anchor="t"/>
+          <a:lstStyle/>
+          <a:p>
+            <a:pPr algn="l" marL="342900" indent="-342900">
+              <a:lnSpc>
+                <a:spcPts val="1620"/>
+              </a:lnSpc>
+              <a:spcAft>
+                <a:spcPts val="300"/>
+              </a:spcAft>
+              <a:buSzPct val="100000"/>
+              <a:buChar char="•"/>
+            </a:pPr>
+            <a:r>
+              <a:rPr lang="en-US" sz="1200" dirty="0">
+                <a:solidFill>
+                  <a:srgbClr val="2C2C2C"/>
+                </a:solidFill>
+                <a:latin typeface="Verdana" pitchFamily="34" charset="0"/>
+                <a:ea typeface="Verdana" pitchFamily="34" charset="-122"/>
+                <a:cs typeface="Verdana" pitchFamily="34" charset="-120"/>
+              </a:rPr>
+              <a:t>5 small boxes on one page.</a:t>
+            </a:r>
+            <a:endParaRPr lang="en-US" sz="1200" dirty="0"/>
+          </a:p>
+          <a:p>
+            <a:pPr algn="l" marL="342900" indent="-342900">
+              <a:lnSpc>
+                <a:spcPts val="1620"/>
+              </a:lnSpc>
+              <a:spcAft>
+                <a:spcPts val="300"/>
+              </a:spcAft>
+              <a:buSzPct val="100000"/>
+              <a:buChar char="•"/>
+            </a:pPr>
+            <a:r>
+              <a:rPr lang="en-US" sz="1200" dirty="0">
+                <a:solidFill>
+                  <a:srgbClr val="2C2C2C"/>
+                </a:solidFill>
+                <a:latin typeface="Verdana" pitchFamily="34" charset="0"/>
+                <a:ea typeface="Verdana" pitchFamily="34" charset="-122"/>
+                <a:cs typeface="Verdana" pitchFamily="34" charset="-120"/>
+              </a:rPr>
+              <a:t>One element name in each box (teacher helps).</a:t>
+            </a:r>
+            <a:endParaRPr lang="en-US" sz="1200" dirty="0"/>
+          </a:p>
+          <a:p>
+            <a:pPr algn="l" marL="342900" indent="-342900">
+              <a:lnSpc>
+                <a:spcPts val="1620"/>
+              </a:lnSpc>
+              <a:spcAft>
+                <a:spcPts val="300"/>
+              </a:spcAft>
+              <a:buSzPct val="100000"/>
+              <a:buChar char="•"/>
+            </a:pPr>
+            <a:r>
+              <a:rPr lang="en-US" sz="1200" dirty="0">
+                <a:solidFill>
+                  <a:srgbClr val="2C2C2C"/>
+                </a:solidFill>
+                <a:latin typeface="Verdana" pitchFamily="34" charset="0"/>
+                <a:ea typeface="Verdana" pitchFamily="34" charset="-122"/>
+                <a:cs typeface="Verdana" pitchFamily="34" charset="-120"/>
+              </a:rPr>
+              <a:t>One small picture in each box.</a:t>
+            </a:r>
+            <a:endParaRPr lang="en-US" sz="1200" dirty="0"/>
+          </a:p>
+        </p:txBody>
+      </p:sp>
+      <p:sp>
+        <p:nvSpPr>
+          <p:cNvPr id="6" name="Text 4"/>
           <p:cNvSpPr/>
           <p:nvPr/>
         </p:nvSpPr>
